--- a/1 занятие/Презентация.pptx
+++ b/1 занятие/Презентация.pptx
@@ -5,17 +5,25 @@
     <p:sldMasterId id="2147483648" r:id="rId1"/>
   </p:sldMasterIdLst>
   <p:notesMasterIdLst>
-    <p:notesMasterId r:id="rId10"/>
+    <p:notesMasterId r:id="rId18"/>
   </p:notesMasterIdLst>
   <p:sldIdLst>
     <p:sldId id="340" r:id="rId2"/>
     <p:sldId id="341" r:id="rId3"/>
     <p:sldId id="347" r:id="rId4"/>
-    <p:sldId id="344" r:id="rId5"/>
-    <p:sldId id="345" r:id="rId6"/>
-    <p:sldId id="348" r:id="rId7"/>
-    <p:sldId id="349" r:id="rId8"/>
-    <p:sldId id="350" r:id="rId9"/>
+    <p:sldId id="351" r:id="rId5"/>
+    <p:sldId id="352" r:id="rId6"/>
+    <p:sldId id="353" r:id="rId7"/>
+    <p:sldId id="356" r:id="rId8"/>
+    <p:sldId id="357" r:id="rId9"/>
+    <p:sldId id="354" r:id="rId10"/>
+    <p:sldId id="355" r:id="rId11"/>
+    <p:sldId id="358" r:id="rId12"/>
+    <p:sldId id="344" r:id="rId13"/>
+    <p:sldId id="345" r:id="rId14"/>
+    <p:sldId id="348" r:id="rId15"/>
+    <p:sldId id="349" r:id="rId16"/>
+    <p:sldId id="350" r:id="rId17"/>
   </p:sldIdLst>
   <p:sldSz cx="12192000" cy="6858000"/>
   <p:notesSz cx="6858000" cy="9144000"/>
@@ -122,6 +130,14 @@
             <p14:sldId id="340"/>
             <p14:sldId id="341"/>
             <p14:sldId id="347"/>
+            <p14:sldId id="351"/>
+            <p14:sldId id="352"/>
+            <p14:sldId id="353"/>
+            <p14:sldId id="356"/>
+            <p14:sldId id="357"/>
+            <p14:sldId id="354"/>
+            <p14:sldId id="355"/>
+            <p14:sldId id="358"/>
             <p14:sldId id="344"/>
             <p14:sldId id="345"/>
             <p14:sldId id="348"/>
@@ -220,7 +236,7 @@
           <a:p>
             <a:fld id="{67773027-2AB3-4DAB-83B2-DF4B13C5C569}" type="datetimeFigureOut">
               <a:rPr lang="ru-RU" smtClean="0"/>
-              <a:t>26.09.2026</a:t>
+              <a:t>31.10.2026</a:t>
             </a:fld>
             <a:endParaRPr lang="ru-RU"/>
           </a:p>
@@ -664,7 +680,7 @@
 </p:notes>
 </file>
 
-<file path=ppt/notesSlides/notesSlide2.xml><?xml version="1.0" encoding="utf-8"?>
+<file path=ppt/notesSlides/notesSlide10.xml><?xml version="1.0" encoding="utf-8"?>
 <p:notes xmlns:a="http://schemas.openxmlformats.org/drawingml/2006/main" xmlns:r="http://schemas.openxmlformats.org/officeDocument/2006/relationships" xmlns:p="http://schemas.openxmlformats.org/presentationml/2006/main">
   <p:cSld>
     <p:spTree>
@@ -1727,7 +1743,7 @@
           <a:p>
             <a:fld id="{027685D7-C350-491D-A933-7035F35F7262}" type="slidenum">
               <a:rPr lang="ru-RU" smtClean="0"/>
-              <a:t>4</a:t>
+              <a:t>12</a:t>
             </a:fld>
             <a:endParaRPr lang="ru-RU"/>
           </a:p>
@@ -1746,7 +1762,7 @@
 </p:notes>
 </file>
 
-<file path=ppt/notesSlides/notesSlide3.xml><?xml version="1.0" encoding="utf-8"?>
+<file path=ppt/notesSlides/notesSlide11.xml><?xml version="1.0" encoding="utf-8"?>
 <p:notes xmlns:a="http://schemas.openxmlformats.org/drawingml/2006/main" xmlns:r="http://schemas.openxmlformats.org/officeDocument/2006/relationships" xmlns:p="http://schemas.openxmlformats.org/presentationml/2006/main">
   <p:cSld>
     <p:spTree>
@@ -2983,7 +2999,7 @@
           <a:p>
             <a:fld id="{027685D7-C350-491D-A933-7035F35F7262}" type="slidenum">
               <a:rPr lang="ru-RU" smtClean="0"/>
-              <a:t>5</a:t>
+              <a:t>13</a:t>
             </a:fld>
             <a:endParaRPr lang="ru-RU"/>
           </a:p>
@@ -3002,7 +3018,7 @@
 </p:notes>
 </file>
 
-<file path=ppt/notesSlides/notesSlide4.xml><?xml version="1.0" encoding="utf-8"?>
+<file path=ppt/notesSlides/notesSlide12.xml><?xml version="1.0" encoding="utf-8"?>
 <p:notes xmlns:a="http://schemas.openxmlformats.org/drawingml/2006/main" xmlns:r="http://schemas.openxmlformats.org/officeDocument/2006/relationships" xmlns:p="http://schemas.openxmlformats.org/presentationml/2006/main">
   <p:cSld>
     <p:spTree>
@@ -3084,7 +3100,7 @@
           <a:p>
             <a:fld id="{027685D7-C350-491D-A933-7035F35F7262}" type="slidenum">
               <a:rPr lang="ru-RU" smtClean="0"/>
-              <a:t>7</a:t>
+              <a:t>15</a:t>
             </a:fld>
             <a:endParaRPr lang="ru-RU"/>
           </a:p>
@@ -3094,6 +3110,870 @@
     <p:extLst>
       <p:ext uri="{BB962C8B-B14F-4D97-AF65-F5344CB8AC3E}">
         <p14:creationId xmlns:p14="http://schemas.microsoft.com/office/powerpoint/2010/main" val="669218116"/>
+      </p:ext>
+    </p:extLst>
+  </p:cSld>
+  <p:clrMapOvr>
+    <a:masterClrMapping/>
+  </p:clrMapOvr>
+</p:notes>
+</file>
+
+<file path=ppt/notesSlides/notesSlide2.xml><?xml version="1.0" encoding="utf-8"?>
+<p:notes xmlns:a="http://schemas.openxmlformats.org/drawingml/2006/main" xmlns:r="http://schemas.openxmlformats.org/officeDocument/2006/relationships" xmlns:p="http://schemas.openxmlformats.org/presentationml/2006/main">
+  <p:cSld>
+    <p:spTree>
+      <p:nvGrpSpPr>
+        <p:cNvPr id="1" name="">
+          <a:extLst>
+            <a:ext uri="{FF2B5EF4-FFF2-40B4-BE49-F238E27FC236}">
+              <a16:creationId xmlns:a16="http://schemas.microsoft.com/office/drawing/2014/main" id="{C37D0E6F-A719-C604-0068-B2866AA3F041}"/>
+            </a:ext>
+          </a:extLst>
+        </p:cNvPr>
+        <p:cNvGrpSpPr/>
+        <p:nvPr/>
+      </p:nvGrpSpPr>
+      <p:grpSpPr>
+        <a:xfrm>
+          <a:off x="0" y="0"/>
+          <a:ext cx="0" cy="0"/>
+          <a:chOff x="0" y="0"/>
+          <a:chExt cx="0" cy="0"/>
+        </a:xfrm>
+      </p:grpSpPr>
+      <p:sp>
+        <p:nvSpPr>
+          <p:cNvPr id="2" name="Образ слайда 1">
+            <a:extLst>
+              <a:ext uri="{FF2B5EF4-FFF2-40B4-BE49-F238E27FC236}">
+                <a16:creationId xmlns:a16="http://schemas.microsoft.com/office/drawing/2014/main" id="{1E384FEB-D2D3-D61D-FA61-8688079912A3}"/>
+              </a:ext>
+            </a:extLst>
+          </p:cNvPr>
+          <p:cNvSpPr>
+            <a:spLocks noGrp="1" noRot="1" noChangeAspect="1"/>
+          </p:cNvSpPr>
+          <p:nvPr>
+            <p:ph type="sldImg"/>
+          </p:nvPr>
+        </p:nvSpPr>
+        <p:spPr/>
+      </p:sp>
+      <p:sp>
+        <p:nvSpPr>
+          <p:cNvPr id="3" name="Заметки 2">
+            <a:extLst>
+              <a:ext uri="{FF2B5EF4-FFF2-40B4-BE49-F238E27FC236}">
+                <a16:creationId xmlns:a16="http://schemas.microsoft.com/office/drawing/2014/main" id="{C86594CA-205D-8F3A-D78A-585CFFDE7FE7}"/>
+              </a:ext>
+            </a:extLst>
+          </p:cNvPr>
+          <p:cNvSpPr>
+            <a:spLocks noGrp="1"/>
+          </p:cNvSpPr>
+          <p:nvPr>
+            <p:ph type="body" idx="1"/>
+          </p:nvPr>
+        </p:nvSpPr>
+        <p:spPr/>
+        <p:txBody>
+          <a:bodyPr/>
+          <a:lstStyle/>
+          <a:p>
+            <a:endParaRPr lang="ru-RU" dirty="0"/>
+          </a:p>
+        </p:txBody>
+      </p:sp>
+      <p:sp>
+        <p:nvSpPr>
+          <p:cNvPr id="4" name="Номер слайда 3">
+            <a:extLst>
+              <a:ext uri="{FF2B5EF4-FFF2-40B4-BE49-F238E27FC236}">
+                <a16:creationId xmlns:a16="http://schemas.microsoft.com/office/drawing/2014/main" id="{297B32FC-5383-6E61-F07C-BB7824CFE632}"/>
+              </a:ext>
+            </a:extLst>
+          </p:cNvPr>
+          <p:cNvSpPr>
+            <a:spLocks noGrp="1"/>
+          </p:cNvSpPr>
+          <p:nvPr>
+            <p:ph type="sldNum" sz="quarter" idx="5"/>
+          </p:nvPr>
+        </p:nvSpPr>
+        <p:spPr/>
+        <p:txBody>
+          <a:bodyPr/>
+          <a:lstStyle/>
+          <a:p>
+            <a:fld id="{027685D7-C350-491D-A933-7035F35F7262}" type="slidenum">
+              <a:rPr lang="ru-RU" smtClean="0"/>
+              <a:t>4</a:t>
+            </a:fld>
+            <a:endParaRPr lang="ru-RU"/>
+          </a:p>
+        </p:txBody>
+      </p:sp>
+    </p:spTree>
+    <p:extLst>
+      <p:ext uri="{BB962C8B-B14F-4D97-AF65-F5344CB8AC3E}">
+        <p14:creationId xmlns:p14="http://schemas.microsoft.com/office/powerpoint/2010/main" val="2894844049"/>
+      </p:ext>
+    </p:extLst>
+  </p:cSld>
+  <p:clrMapOvr>
+    <a:masterClrMapping/>
+  </p:clrMapOvr>
+</p:notes>
+</file>
+
+<file path=ppt/notesSlides/notesSlide3.xml><?xml version="1.0" encoding="utf-8"?>
+<p:notes xmlns:a="http://schemas.openxmlformats.org/drawingml/2006/main" xmlns:r="http://schemas.openxmlformats.org/officeDocument/2006/relationships" xmlns:p="http://schemas.openxmlformats.org/presentationml/2006/main">
+  <p:cSld>
+    <p:spTree>
+      <p:nvGrpSpPr>
+        <p:cNvPr id="1" name="">
+          <a:extLst>
+            <a:ext uri="{FF2B5EF4-FFF2-40B4-BE49-F238E27FC236}">
+              <a16:creationId xmlns:a16="http://schemas.microsoft.com/office/drawing/2014/main" id="{FEE80BDC-7EAE-2467-F7D2-0A78BAAB5199}"/>
+            </a:ext>
+          </a:extLst>
+        </p:cNvPr>
+        <p:cNvGrpSpPr/>
+        <p:nvPr/>
+      </p:nvGrpSpPr>
+      <p:grpSpPr>
+        <a:xfrm>
+          <a:off x="0" y="0"/>
+          <a:ext cx="0" cy="0"/>
+          <a:chOff x="0" y="0"/>
+          <a:chExt cx="0" cy="0"/>
+        </a:xfrm>
+      </p:grpSpPr>
+      <p:sp>
+        <p:nvSpPr>
+          <p:cNvPr id="2" name="Образ слайда 1">
+            <a:extLst>
+              <a:ext uri="{FF2B5EF4-FFF2-40B4-BE49-F238E27FC236}">
+                <a16:creationId xmlns:a16="http://schemas.microsoft.com/office/drawing/2014/main" id="{712AA0F1-DB49-3FB3-50E3-714F729EDEFA}"/>
+              </a:ext>
+            </a:extLst>
+          </p:cNvPr>
+          <p:cNvSpPr>
+            <a:spLocks noGrp="1" noRot="1" noChangeAspect="1"/>
+          </p:cNvSpPr>
+          <p:nvPr>
+            <p:ph type="sldImg"/>
+          </p:nvPr>
+        </p:nvSpPr>
+        <p:spPr/>
+      </p:sp>
+      <p:sp>
+        <p:nvSpPr>
+          <p:cNvPr id="3" name="Заметки 2">
+            <a:extLst>
+              <a:ext uri="{FF2B5EF4-FFF2-40B4-BE49-F238E27FC236}">
+                <a16:creationId xmlns:a16="http://schemas.microsoft.com/office/drawing/2014/main" id="{D42BBED6-D66B-EE7B-38EF-7379DEE426DF}"/>
+              </a:ext>
+            </a:extLst>
+          </p:cNvPr>
+          <p:cNvSpPr>
+            <a:spLocks noGrp="1"/>
+          </p:cNvSpPr>
+          <p:nvPr>
+            <p:ph type="body" idx="1"/>
+          </p:nvPr>
+        </p:nvSpPr>
+        <p:spPr/>
+        <p:txBody>
+          <a:bodyPr/>
+          <a:lstStyle/>
+          <a:p>
+            <a:endParaRPr lang="ru-RU" dirty="0"/>
+          </a:p>
+        </p:txBody>
+      </p:sp>
+      <p:sp>
+        <p:nvSpPr>
+          <p:cNvPr id="4" name="Номер слайда 3">
+            <a:extLst>
+              <a:ext uri="{FF2B5EF4-FFF2-40B4-BE49-F238E27FC236}">
+                <a16:creationId xmlns:a16="http://schemas.microsoft.com/office/drawing/2014/main" id="{D7E238C8-7749-2F8F-879B-5EC11EA6E978}"/>
+              </a:ext>
+            </a:extLst>
+          </p:cNvPr>
+          <p:cNvSpPr>
+            <a:spLocks noGrp="1"/>
+          </p:cNvSpPr>
+          <p:nvPr>
+            <p:ph type="sldNum" sz="quarter" idx="5"/>
+          </p:nvPr>
+        </p:nvSpPr>
+        <p:spPr/>
+        <p:txBody>
+          <a:bodyPr/>
+          <a:lstStyle/>
+          <a:p>
+            <a:fld id="{027685D7-C350-491D-A933-7035F35F7262}" type="slidenum">
+              <a:rPr lang="ru-RU" smtClean="0"/>
+              <a:t>5</a:t>
+            </a:fld>
+            <a:endParaRPr lang="ru-RU"/>
+          </a:p>
+        </p:txBody>
+      </p:sp>
+    </p:spTree>
+    <p:extLst>
+      <p:ext uri="{BB962C8B-B14F-4D97-AF65-F5344CB8AC3E}">
+        <p14:creationId xmlns:p14="http://schemas.microsoft.com/office/powerpoint/2010/main" val="2916955549"/>
+      </p:ext>
+    </p:extLst>
+  </p:cSld>
+  <p:clrMapOvr>
+    <a:masterClrMapping/>
+  </p:clrMapOvr>
+</p:notes>
+</file>
+
+<file path=ppt/notesSlides/notesSlide4.xml><?xml version="1.0" encoding="utf-8"?>
+<p:notes xmlns:a="http://schemas.openxmlformats.org/drawingml/2006/main" xmlns:r="http://schemas.openxmlformats.org/officeDocument/2006/relationships" xmlns:p="http://schemas.openxmlformats.org/presentationml/2006/main">
+  <p:cSld>
+    <p:spTree>
+      <p:nvGrpSpPr>
+        <p:cNvPr id="1" name="">
+          <a:extLst>
+            <a:ext uri="{FF2B5EF4-FFF2-40B4-BE49-F238E27FC236}">
+              <a16:creationId xmlns:a16="http://schemas.microsoft.com/office/drawing/2014/main" id="{F8AE05E6-C58B-F2AA-EF5D-433AFC4FA0C5}"/>
+            </a:ext>
+          </a:extLst>
+        </p:cNvPr>
+        <p:cNvGrpSpPr/>
+        <p:nvPr/>
+      </p:nvGrpSpPr>
+      <p:grpSpPr>
+        <a:xfrm>
+          <a:off x="0" y="0"/>
+          <a:ext cx="0" cy="0"/>
+          <a:chOff x="0" y="0"/>
+          <a:chExt cx="0" cy="0"/>
+        </a:xfrm>
+      </p:grpSpPr>
+      <p:sp>
+        <p:nvSpPr>
+          <p:cNvPr id="2" name="Образ слайда 1">
+            <a:extLst>
+              <a:ext uri="{FF2B5EF4-FFF2-40B4-BE49-F238E27FC236}">
+                <a16:creationId xmlns:a16="http://schemas.microsoft.com/office/drawing/2014/main" id="{DDDF8337-73F7-4521-AAC2-86B237D265BA}"/>
+              </a:ext>
+            </a:extLst>
+          </p:cNvPr>
+          <p:cNvSpPr>
+            <a:spLocks noGrp="1" noRot="1" noChangeAspect="1"/>
+          </p:cNvSpPr>
+          <p:nvPr>
+            <p:ph type="sldImg"/>
+          </p:nvPr>
+        </p:nvSpPr>
+        <p:spPr/>
+      </p:sp>
+      <p:sp>
+        <p:nvSpPr>
+          <p:cNvPr id="3" name="Заметки 2">
+            <a:extLst>
+              <a:ext uri="{FF2B5EF4-FFF2-40B4-BE49-F238E27FC236}">
+                <a16:creationId xmlns:a16="http://schemas.microsoft.com/office/drawing/2014/main" id="{92D392F4-B508-B43D-4A19-2AD07ED16AE0}"/>
+              </a:ext>
+            </a:extLst>
+          </p:cNvPr>
+          <p:cNvSpPr>
+            <a:spLocks noGrp="1"/>
+          </p:cNvSpPr>
+          <p:nvPr>
+            <p:ph type="body" idx="1"/>
+          </p:nvPr>
+        </p:nvSpPr>
+        <p:spPr/>
+        <p:txBody>
+          <a:bodyPr/>
+          <a:lstStyle/>
+          <a:p>
+            <a:endParaRPr lang="ru-RU" dirty="0"/>
+          </a:p>
+        </p:txBody>
+      </p:sp>
+      <p:sp>
+        <p:nvSpPr>
+          <p:cNvPr id="4" name="Номер слайда 3">
+            <a:extLst>
+              <a:ext uri="{FF2B5EF4-FFF2-40B4-BE49-F238E27FC236}">
+                <a16:creationId xmlns:a16="http://schemas.microsoft.com/office/drawing/2014/main" id="{96DDE8DC-AAA4-6213-8747-72A42D2B62D3}"/>
+              </a:ext>
+            </a:extLst>
+          </p:cNvPr>
+          <p:cNvSpPr>
+            <a:spLocks noGrp="1"/>
+          </p:cNvSpPr>
+          <p:nvPr>
+            <p:ph type="sldNum" sz="quarter" idx="5"/>
+          </p:nvPr>
+        </p:nvSpPr>
+        <p:spPr/>
+        <p:txBody>
+          <a:bodyPr/>
+          <a:lstStyle/>
+          <a:p>
+            <a:fld id="{027685D7-C350-491D-A933-7035F35F7262}" type="slidenum">
+              <a:rPr lang="ru-RU" smtClean="0"/>
+              <a:t>6</a:t>
+            </a:fld>
+            <a:endParaRPr lang="ru-RU"/>
+          </a:p>
+        </p:txBody>
+      </p:sp>
+    </p:spTree>
+    <p:extLst>
+      <p:ext uri="{BB962C8B-B14F-4D97-AF65-F5344CB8AC3E}">
+        <p14:creationId xmlns:p14="http://schemas.microsoft.com/office/powerpoint/2010/main" val="3894144717"/>
+      </p:ext>
+    </p:extLst>
+  </p:cSld>
+  <p:clrMapOvr>
+    <a:masterClrMapping/>
+  </p:clrMapOvr>
+</p:notes>
+</file>
+
+<file path=ppt/notesSlides/notesSlide5.xml><?xml version="1.0" encoding="utf-8"?>
+<p:notes xmlns:a="http://schemas.openxmlformats.org/drawingml/2006/main" xmlns:r="http://schemas.openxmlformats.org/officeDocument/2006/relationships" xmlns:p="http://schemas.openxmlformats.org/presentationml/2006/main">
+  <p:cSld>
+    <p:spTree>
+      <p:nvGrpSpPr>
+        <p:cNvPr id="1" name="">
+          <a:extLst>
+            <a:ext uri="{FF2B5EF4-FFF2-40B4-BE49-F238E27FC236}">
+              <a16:creationId xmlns:a16="http://schemas.microsoft.com/office/drawing/2014/main" id="{A8071BBD-21E1-B9A8-1FF1-6CF8F232F2FB}"/>
+            </a:ext>
+          </a:extLst>
+        </p:cNvPr>
+        <p:cNvGrpSpPr/>
+        <p:nvPr/>
+      </p:nvGrpSpPr>
+      <p:grpSpPr>
+        <a:xfrm>
+          <a:off x="0" y="0"/>
+          <a:ext cx="0" cy="0"/>
+          <a:chOff x="0" y="0"/>
+          <a:chExt cx="0" cy="0"/>
+        </a:xfrm>
+      </p:grpSpPr>
+      <p:sp>
+        <p:nvSpPr>
+          <p:cNvPr id="2" name="Образ слайда 1">
+            <a:extLst>
+              <a:ext uri="{FF2B5EF4-FFF2-40B4-BE49-F238E27FC236}">
+                <a16:creationId xmlns:a16="http://schemas.microsoft.com/office/drawing/2014/main" id="{9B1AE08C-7376-3342-2C76-04C7D44A6401}"/>
+              </a:ext>
+            </a:extLst>
+          </p:cNvPr>
+          <p:cNvSpPr>
+            <a:spLocks noGrp="1" noRot="1" noChangeAspect="1"/>
+          </p:cNvSpPr>
+          <p:nvPr>
+            <p:ph type="sldImg"/>
+          </p:nvPr>
+        </p:nvSpPr>
+        <p:spPr/>
+      </p:sp>
+      <p:sp>
+        <p:nvSpPr>
+          <p:cNvPr id="3" name="Заметки 2">
+            <a:extLst>
+              <a:ext uri="{FF2B5EF4-FFF2-40B4-BE49-F238E27FC236}">
+                <a16:creationId xmlns:a16="http://schemas.microsoft.com/office/drawing/2014/main" id="{6380B4B5-4ED9-9F93-2415-13B5FB26B72F}"/>
+              </a:ext>
+            </a:extLst>
+          </p:cNvPr>
+          <p:cNvSpPr>
+            <a:spLocks noGrp="1"/>
+          </p:cNvSpPr>
+          <p:nvPr>
+            <p:ph type="body" idx="1"/>
+          </p:nvPr>
+        </p:nvSpPr>
+        <p:spPr/>
+        <p:txBody>
+          <a:bodyPr/>
+          <a:lstStyle/>
+          <a:p>
+            <a:endParaRPr lang="ru-RU" dirty="0"/>
+          </a:p>
+        </p:txBody>
+      </p:sp>
+      <p:sp>
+        <p:nvSpPr>
+          <p:cNvPr id="4" name="Номер слайда 3">
+            <a:extLst>
+              <a:ext uri="{FF2B5EF4-FFF2-40B4-BE49-F238E27FC236}">
+                <a16:creationId xmlns:a16="http://schemas.microsoft.com/office/drawing/2014/main" id="{4A8511F8-0C81-7FBC-E750-542CD5836456}"/>
+              </a:ext>
+            </a:extLst>
+          </p:cNvPr>
+          <p:cNvSpPr>
+            <a:spLocks noGrp="1"/>
+          </p:cNvSpPr>
+          <p:nvPr>
+            <p:ph type="sldNum" sz="quarter" idx="5"/>
+          </p:nvPr>
+        </p:nvSpPr>
+        <p:spPr/>
+        <p:txBody>
+          <a:bodyPr/>
+          <a:lstStyle/>
+          <a:p>
+            <a:fld id="{027685D7-C350-491D-A933-7035F35F7262}" type="slidenum">
+              <a:rPr lang="ru-RU" smtClean="0"/>
+              <a:t>7</a:t>
+            </a:fld>
+            <a:endParaRPr lang="ru-RU"/>
+          </a:p>
+        </p:txBody>
+      </p:sp>
+    </p:spTree>
+    <p:extLst>
+      <p:ext uri="{BB962C8B-B14F-4D97-AF65-F5344CB8AC3E}">
+        <p14:creationId xmlns:p14="http://schemas.microsoft.com/office/powerpoint/2010/main" val="3930130184"/>
+      </p:ext>
+    </p:extLst>
+  </p:cSld>
+  <p:clrMapOvr>
+    <a:masterClrMapping/>
+  </p:clrMapOvr>
+</p:notes>
+</file>
+
+<file path=ppt/notesSlides/notesSlide6.xml><?xml version="1.0" encoding="utf-8"?>
+<p:notes xmlns:a="http://schemas.openxmlformats.org/drawingml/2006/main" xmlns:r="http://schemas.openxmlformats.org/officeDocument/2006/relationships" xmlns:p="http://schemas.openxmlformats.org/presentationml/2006/main">
+  <p:cSld>
+    <p:spTree>
+      <p:nvGrpSpPr>
+        <p:cNvPr id="1" name="">
+          <a:extLst>
+            <a:ext uri="{FF2B5EF4-FFF2-40B4-BE49-F238E27FC236}">
+              <a16:creationId xmlns:a16="http://schemas.microsoft.com/office/drawing/2014/main" id="{41999554-B0DA-A72E-9962-A861092D0FB9}"/>
+            </a:ext>
+          </a:extLst>
+        </p:cNvPr>
+        <p:cNvGrpSpPr/>
+        <p:nvPr/>
+      </p:nvGrpSpPr>
+      <p:grpSpPr>
+        <a:xfrm>
+          <a:off x="0" y="0"/>
+          <a:ext cx="0" cy="0"/>
+          <a:chOff x="0" y="0"/>
+          <a:chExt cx="0" cy="0"/>
+        </a:xfrm>
+      </p:grpSpPr>
+      <p:sp>
+        <p:nvSpPr>
+          <p:cNvPr id="2" name="Образ слайда 1">
+            <a:extLst>
+              <a:ext uri="{FF2B5EF4-FFF2-40B4-BE49-F238E27FC236}">
+                <a16:creationId xmlns:a16="http://schemas.microsoft.com/office/drawing/2014/main" id="{C8948714-556C-FAC5-17B2-7435D310639E}"/>
+              </a:ext>
+            </a:extLst>
+          </p:cNvPr>
+          <p:cNvSpPr>
+            <a:spLocks noGrp="1" noRot="1" noChangeAspect="1"/>
+          </p:cNvSpPr>
+          <p:nvPr>
+            <p:ph type="sldImg"/>
+          </p:nvPr>
+        </p:nvSpPr>
+        <p:spPr/>
+      </p:sp>
+      <p:sp>
+        <p:nvSpPr>
+          <p:cNvPr id="3" name="Заметки 2">
+            <a:extLst>
+              <a:ext uri="{FF2B5EF4-FFF2-40B4-BE49-F238E27FC236}">
+                <a16:creationId xmlns:a16="http://schemas.microsoft.com/office/drawing/2014/main" id="{2107D8BA-14FA-0E43-841F-3044D9855EB9}"/>
+              </a:ext>
+            </a:extLst>
+          </p:cNvPr>
+          <p:cNvSpPr>
+            <a:spLocks noGrp="1"/>
+          </p:cNvSpPr>
+          <p:nvPr>
+            <p:ph type="body" idx="1"/>
+          </p:nvPr>
+        </p:nvSpPr>
+        <p:spPr/>
+        <p:txBody>
+          <a:bodyPr/>
+          <a:lstStyle/>
+          <a:p>
+            <a:endParaRPr lang="ru-RU" dirty="0"/>
+          </a:p>
+        </p:txBody>
+      </p:sp>
+      <p:sp>
+        <p:nvSpPr>
+          <p:cNvPr id="4" name="Номер слайда 3">
+            <a:extLst>
+              <a:ext uri="{FF2B5EF4-FFF2-40B4-BE49-F238E27FC236}">
+                <a16:creationId xmlns:a16="http://schemas.microsoft.com/office/drawing/2014/main" id="{3E5C6D4C-E1E9-14DA-E5F6-C48E724E9A6B}"/>
+              </a:ext>
+            </a:extLst>
+          </p:cNvPr>
+          <p:cNvSpPr>
+            <a:spLocks noGrp="1"/>
+          </p:cNvSpPr>
+          <p:nvPr>
+            <p:ph type="sldNum" sz="quarter" idx="5"/>
+          </p:nvPr>
+        </p:nvSpPr>
+        <p:spPr/>
+        <p:txBody>
+          <a:bodyPr/>
+          <a:lstStyle/>
+          <a:p>
+            <a:fld id="{027685D7-C350-491D-A933-7035F35F7262}" type="slidenum">
+              <a:rPr lang="ru-RU" smtClean="0"/>
+              <a:t>8</a:t>
+            </a:fld>
+            <a:endParaRPr lang="ru-RU"/>
+          </a:p>
+        </p:txBody>
+      </p:sp>
+    </p:spTree>
+    <p:extLst>
+      <p:ext uri="{BB962C8B-B14F-4D97-AF65-F5344CB8AC3E}">
+        <p14:creationId xmlns:p14="http://schemas.microsoft.com/office/powerpoint/2010/main" val="3085510743"/>
+      </p:ext>
+    </p:extLst>
+  </p:cSld>
+  <p:clrMapOvr>
+    <a:masterClrMapping/>
+  </p:clrMapOvr>
+</p:notes>
+</file>
+
+<file path=ppt/notesSlides/notesSlide7.xml><?xml version="1.0" encoding="utf-8"?>
+<p:notes xmlns:a="http://schemas.openxmlformats.org/drawingml/2006/main" xmlns:r="http://schemas.openxmlformats.org/officeDocument/2006/relationships" xmlns:p="http://schemas.openxmlformats.org/presentationml/2006/main">
+  <p:cSld>
+    <p:spTree>
+      <p:nvGrpSpPr>
+        <p:cNvPr id="1" name="">
+          <a:extLst>
+            <a:ext uri="{FF2B5EF4-FFF2-40B4-BE49-F238E27FC236}">
+              <a16:creationId xmlns:a16="http://schemas.microsoft.com/office/drawing/2014/main" id="{4B3A3CB7-7BD3-2EF0-FBFE-FA6102FD7D8E}"/>
+            </a:ext>
+          </a:extLst>
+        </p:cNvPr>
+        <p:cNvGrpSpPr/>
+        <p:nvPr/>
+      </p:nvGrpSpPr>
+      <p:grpSpPr>
+        <a:xfrm>
+          <a:off x="0" y="0"/>
+          <a:ext cx="0" cy="0"/>
+          <a:chOff x="0" y="0"/>
+          <a:chExt cx="0" cy="0"/>
+        </a:xfrm>
+      </p:grpSpPr>
+      <p:sp>
+        <p:nvSpPr>
+          <p:cNvPr id="2" name="Образ слайда 1">
+            <a:extLst>
+              <a:ext uri="{FF2B5EF4-FFF2-40B4-BE49-F238E27FC236}">
+                <a16:creationId xmlns:a16="http://schemas.microsoft.com/office/drawing/2014/main" id="{154E363A-86E9-FF5C-1B11-084CA2B8CB22}"/>
+              </a:ext>
+            </a:extLst>
+          </p:cNvPr>
+          <p:cNvSpPr>
+            <a:spLocks noGrp="1" noRot="1" noChangeAspect="1"/>
+          </p:cNvSpPr>
+          <p:nvPr>
+            <p:ph type="sldImg"/>
+          </p:nvPr>
+        </p:nvSpPr>
+        <p:spPr/>
+      </p:sp>
+      <p:sp>
+        <p:nvSpPr>
+          <p:cNvPr id="3" name="Заметки 2">
+            <a:extLst>
+              <a:ext uri="{FF2B5EF4-FFF2-40B4-BE49-F238E27FC236}">
+                <a16:creationId xmlns:a16="http://schemas.microsoft.com/office/drawing/2014/main" id="{049B91EE-F4D5-1DD4-AB41-B987EBBF5BAE}"/>
+              </a:ext>
+            </a:extLst>
+          </p:cNvPr>
+          <p:cNvSpPr>
+            <a:spLocks noGrp="1"/>
+          </p:cNvSpPr>
+          <p:nvPr>
+            <p:ph type="body" idx="1"/>
+          </p:nvPr>
+        </p:nvSpPr>
+        <p:spPr/>
+        <p:txBody>
+          <a:bodyPr/>
+          <a:lstStyle/>
+          <a:p>
+            <a:endParaRPr lang="ru-RU" dirty="0"/>
+          </a:p>
+        </p:txBody>
+      </p:sp>
+      <p:sp>
+        <p:nvSpPr>
+          <p:cNvPr id="4" name="Номер слайда 3">
+            <a:extLst>
+              <a:ext uri="{FF2B5EF4-FFF2-40B4-BE49-F238E27FC236}">
+                <a16:creationId xmlns:a16="http://schemas.microsoft.com/office/drawing/2014/main" id="{7424C6D8-DD80-3EC0-00AA-BA6D3930FC0C}"/>
+              </a:ext>
+            </a:extLst>
+          </p:cNvPr>
+          <p:cNvSpPr>
+            <a:spLocks noGrp="1"/>
+          </p:cNvSpPr>
+          <p:nvPr>
+            <p:ph type="sldNum" sz="quarter" idx="5"/>
+          </p:nvPr>
+        </p:nvSpPr>
+        <p:spPr/>
+        <p:txBody>
+          <a:bodyPr/>
+          <a:lstStyle/>
+          <a:p>
+            <a:fld id="{027685D7-C350-491D-A933-7035F35F7262}" type="slidenum">
+              <a:rPr lang="ru-RU" smtClean="0"/>
+              <a:t>9</a:t>
+            </a:fld>
+            <a:endParaRPr lang="ru-RU"/>
+          </a:p>
+        </p:txBody>
+      </p:sp>
+    </p:spTree>
+    <p:extLst>
+      <p:ext uri="{BB962C8B-B14F-4D97-AF65-F5344CB8AC3E}">
+        <p14:creationId xmlns:p14="http://schemas.microsoft.com/office/powerpoint/2010/main" val="1430821261"/>
+      </p:ext>
+    </p:extLst>
+  </p:cSld>
+  <p:clrMapOvr>
+    <a:masterClrMapping/>
+  </p:clrMapOvr>
+</p:notes>
+</file>
+
+<file path=ppt/notesSlides/notesSlide8.xml><?xml version="1.0" encoding="utf-8"?>
+<p:notes xmlns:a="http://schemas.openxmlformats.org/drawingml/2006/main" xmlns:r="http://schemas.openxmlformats.org/officeDocument/2006/relationships" xmlns:p="http://schemas.openxmlformats.org/presentationml/2006/main">
+  <p:cSld>
+    <p:spTree>
+      <p:nvGrpSpPr>
+        <p:cNvPr id="1" name="">
+          <a:extLst>
+            <a:ext uri="{FF2B5EF4-FFF2-40B4-BE49-F238E27FC236}">
+              <a16:creationId xmlns:a16="http://schemas.microsoft.com/office/drawing/2014/main" id="{3D6A8031-484C-5F4A-5CE5-BFC9F050D526}"/>
+            </a:ext>
+          </a:extLst>
+        </p:cNvPr>
+        <p:cNvGrpSpPr/>
+        <p:nvPr/>
+      </p:nvGrpSpPr>
+      <p:grpSpPr>
+        <a:xfrm>
+          <a:off x="0" y="0"/>
+          <a:ext cx="0" cy="0"/>
+          <a:chOff x="0" y="0"/>
+          <a:chExt cx="0" cy="0"/>
+        </a:xfrm>
+      </p:grpSpPr>
+      <p:sp>
+        <p:nvSpPr>
+          <p:cNvPr id="2" name="Образ слайда 1">
+            <a:extLst>
+              <a:ext uri="{FF2B5EF4-FFF2-40B4-BE49-F238E27FC236}">
+                <a16:creationId xmlns:a16="http://schemas.microsoft.com/office/drawing/2014/main" id="{B0F1C703-7A4D-A3FA-DA0E-500EB1F92EA0}"/>
+              </a:ext>
+            </a:extLst>
+          </p:cNvPr>
+          <p:cNvSpPr>
+            <a:spLocks noGrp="1" noRot="1" noChangeAspect="1"/>
+          </p:cNvSpPr>
+          <p:nvPr>
+            <p:ph type="sldImg"/>
+          </p:nvPr>
+        </p:nvSpPr>
+        <p:spPr/>
+      </p:sp>
+      <p:sp>
+        <p:nvSpPr>
+          <p:cNvPr id="3" name="Заметки 2">
+            <a:extLst>
+              <a:ext uri="{FF2B5EF4-FFF2-40B4-BE49-F238E27FC236}">
+                <a16:creationId xmlns:a16="http://schemas.microsoft.com/office/drawing/2014/main" id="{ABB70848-AA9B-79A1-A065-973C69C87193}"/>
+              </a:ext>
+            </a:extLst>
+          </p:cNvPr>
+          <p:cNvSpPr>
+            <a:spLocks noGrp="1"/>
+          </p:cNvSpPr>
+          <p:nvPr>
+            <p:ph type="body" idx="1"/>
+          </p:nvPr>
+        </p:nvSpPr>
+        <p:spPr/>
+        <p:txBody>
+          <a:bodyPr/>
+          <a:lstStyle/>
+          <a:p>
+            <a:endParaRPr lang="ru-RU" dirty="0"/>
+          </a:p>
+        </p:txBody>
+      </p:sp>
+      <p:sp>
+        <p:nvSpPr>
+          <p:cNvPr id="4" name="Номер слайда 3">
+            <a:extLst>
+              <a:ext uri="{FF2B5EF4-FFF2-40B4-BE49-F238E27FC236}">
+                <a16:creationId xmlns:a16="http://schemas.microsoft.com/office/drawing/2014/main" id="{D0F48C4A-2DA4-FD88-622D-1116C13BDE45}"/>
+              </a:ext>
+            </a:extLst>
+          </p:cNvPr>
+          <p:cNvSpPr>
+            <a:spLocks noGrp="1"/>
+          </p:cNvSpPr>
+          <p:nvPr>
+            <p:ph type="sldNum" sz="quarter" idx="5"/>
+          </p:nvPr>
+        </p:nvSpPr>
+        <p:spPr/>
+        <p:txBody>
+          <a:bodyPr/>
+          <a:lstStyle/>
+          <a:p>
+            <a:fld id="{027685D7-C350-491D-A933-7035F35F7262}" type="slidenum">
+              <a:rPr lang="ru-RU" smtClean="0"/>
+              <a:t>10</a:t>
+            </a:fld>
+            <a:endParaRPr lang="ru-RU"/>
+          </a:p>
+        </p:txBody>
+      </p:sp>
+    </p:spTree>
+    <p:extLst>
+      <p:ext uri="{BB962C8B-B14F-4D97-AF65-F5344CB8AC3E}">
+        <p14:creationId xmlns:p14="http://schemas.microsoft.com/office/powerpoint/2010/main" val="2844647596"/>
+      </p:ext>
+    </p:extLst>
+  </p:cSld>
+  <p:clrMapOvr>
+    <a:masterClrMapping/>
+  </p:clrMapOvr>
+</p:notes>
+</file>
+
+<file path=ppt/notesSlides/notesSlide9.xml><?xml version="1.0" encoding="utf-8"?>
+<p:notes xmlns:a="http://schemas.openxmlformats.org/drawingml/2006/main" xmlns:r="http://schemas.openxmlformats.org/officeDocument/2006/relationships" xmlns:p="http://schemas.openxmlformats.org/presentationml/2006/main">
+  <p:cSld>
+    <p:spTree>
+      <p:nvGrpSpPr>
+        <p:cNvPr id="1" name="">
+          <a:extLst>
+            <a:ext uri="{FF2B5EF4-FFF2-40B4-BE49-F238E27FC236}">
+              <a16:creationId xmlns:a16="http://schemas.microsoft.com/office/drawing/2014/main" id="{8A176E61-6AF4-68A5-48B1-417D7111E090}"/>
+            </a:ext>
+          </a:extLst>
+        </p:cNvPr>
+        <p:cNvGrpSpPr/>
+        <p:nvPr/>
+      </p:nvGrpSpPr>
+      <p:grpSpPr>
+        <a:xfrm>
+          <a:off x="0" y="0"/>
+          <a:ext cx="0" cy="0"/>
+          <a:chOff x="0" y="0"/>
+          <a:chExt cx="0" cy="0"/>
+        </a:xfrm>
+      </p:grpSpPr>
+      <p:sp>
+        <p:nvSpPr>
+          <p:cNvPr id="2" name="Образ слайда 1">
+            <a:extLst>
+              <a:ext uri="{FF2B5EF4-FFF2-40B4-BE49-F238E27FC236}">
+                <a16:creationId xmlns:a16="http://schemas.microsoft.com/office/drawing/2014/main" id="{FC3B44F7-6DA1-D7C1-F443-6A6080C3D2B1}"/>
+              </a:ext>
+            </a:extLst>
+          </p:cNvPr>
+          <p:cNvSpPr>
+            <a:spLocks noGrp="1" noRot="1" noChangeAspect="1"/>
+          </p:cNvSpPr>
+          <p:nvPr>
+            <p:ph type="sldImg"/>
+          </p:nvPr>
+        </p:nvSpPr>
+        <p:spPr/>
+      </p:sp>
+      <p:sp>
+        <p:nvSpPr>
+          <p:cNvPr id="3" name="Заметки 2">
+            <a:extLst>
+              <a:ext uri="{FF2B5EF4-FFF2-40B4-BE49-F238E27FC236}">
+                <a16:creationId xmlns:a16="http://schemas.microsoft.com/office/drawing/2014/main" id="{80CBE468-A01B-7277-6203-41D449FBA0FD}"/>
+              </a:ext>
+            </a:extLst>
+          </p:cNvPr>
+          <p:cNvSpPr>
+            <a:spLocks noGrp="1"/>
+          </p:cNvSpPr>
+          <p:nvPr>
+            <p:ph type="body" idx="1"/>
+          </p:nvPr>
+        </p:nvSpPr>
+        <p:spPr/>
+        <p:txBody>
+          <a:bodyPr/>
+          <a:lstStyle/>
+          <a:p>
+            <a:endParaRPr lang="ru-RU" dirty="0"/>
+          </a:p>
+        </p:txBody>
+      </p:sp>
+      <p:sp>
+        <p:nvSpPr>
+          <p:cNvPr id="4" name="Номер слайда 3">
+            <a:extLst>
+              <a:ext uri="{FF2B5EF4-FFF2-40B4-BE49-F238E27FC236}">
+                <a16:creationId xmlns:a16="http://schemas.microsoft.com/office/drawing/2014/main" id="{55FD3232-09CA-4123-E142-18FD67838DC5}"/>
+              </a:ext>
+            </a:extLst>
+          </p:cNvPr>
+          <p:cNvSpPr>
+            <a:spLocks noGrp="1"/>
+          </p:cNvSpPr>
+          <p:nvPr>
+            <p:ph type="sldNum" sz="quarter" idx="5"/>
+          </p:nvPr>
+        </p:nvSpPr>
+        <p:spPr/>
+        <p:txBody>
+          <a:bodyPr/>
+          <a:lstStyle/>
+          <a:p>
+            <a:fld id="{027685D7-C350-491D-A933-7035F35F7262}" type="slidenum">
+              <a:rPr lang="ru-RU" smtClean="0"/>
+              <a:t>11</a:t>
+            </a:fld>
+            <a:endParaRPr lang="ru-RU"/>
+          </a:p>
+        </p:txBody>
+      </p:sp>
+    </p:spTree>
+    <p:extLst>
+      <p:ext uri="{BB962C8B-B14F-4D97-AF65-F5344CB8AC3E}">
+        <p14:creationId xmlns:p14="http://schemas.microsoft.com/office/powerpoint/2010/main" val="286380325"/>
       </p:ext>
     </p:extLst>
   </p:cSld>
@@ -3232,7 +4112,7 @@
           <a:p>
             <a:fld id="{787ECD41-0511-49CF-9DE9-CF7B1A97A83F}" type="datetimeFigureOut">
               <a:rPr lang="ru-RU" smtClean="0"/>
-              <a:t>26.09.2026</a:t>
+              <a:t>31.10.2026</a:t>
             </a:fld>
             <a:endParaRPr lang="ru-RU"/>
           </a:p>
@@ -3400,7 +4280,7 @@
           <a:p>
             <a:fld id="{787ECD41-0511-49CF-9DE9-CF7B1A97A83F}" type="datetimeFigureOut">
               <a:rPr lang="ru-RU" smtClean="0"/>
-              <a:t>26.09.2026</a:t>
+              <a:t>31.10.2026</a:t>
             </a:fld>
             <a:endParaRPr lang="ru-RU"/>
           </a:p>
@@ -3578,7 +4458,7 @@
           <a:p>
             <a:fld id="{787ECD41-0511-49CF-9DE9-CF7B1A97A83F}" type="datetimeFigureOut">
               <a:rPr lang="ru-RU" smtClean="0"/>
-              <a:t>26.09.2026</a:t>
+              <a:t>31.10.2026</a:t>
             </a:fld>
             <a:endParaRPr lang="ru-RU"/>
           </a:p>
@@ -3746,7 +4626,7 @@
           <a:p>
             <a:fld id="{787ECD41-0511-49CF-9DE9-CF7B1A97A83F}" type="datetimeFigureOut">
               <a:rPr lang="ru-RU" smtClean="0"/>
-              <a:t>26.09.2026</a:t>
+              <a:t>31.10.2026</a:t>
             </a:fld>
             <a:endParaRPr lang="ru-RU"/>
           </a:p>
@@ -3991,7 +4871,7 @@
           <a:p>
             <a:fld id="{787ECD41-0511-49CF-9DE9-CF7B1A97A83F}" type="datetimeFigureOut">
               <a:rPr lang="ru-RU" smtClean="0"/>
-              <a:t>26.09.2026</a:t>
+              <a:t>31.10.2026</a:t>
             </a:fld>
             <a:endParaRPr lang="ru-RU"/>
           </a:p>
@@ -4220,7 +5100,7 @@
           <a:p>
             <a:fld id="{787ECD41-0511-49CF-9DE9-CF7B1A97A83F}" type="datetimeFigureOut">
               <a:rPr lang="ru-RU" smtClean="0"/>
-              <a:t>26.09.2026</a:t>
+              <a:t>31.10.2026</a:t>
             </a:fld>
             <a:endParaRPr lang="ru-RU"/>
           </a:p>
@@ -4584,7 +5464,7 @@
           <a:p>
             <a:fld id="{787ECD41-0511-49CF-9DE9-CF7B1A97A83F}" type="datetimeFigureOut">
               <a:rPr lang="ru-RU" smtClean="0"/>
-              <a:t>26.09.2026</a:t>
+              <a:t>31.10.2026</a:t>
             </a:fld>
             <a:endParaRPr lang="ru-RU"/>
           </a:p>
@@ -4701,7 +5581,7 @@
           <a:p>
             <a:fld id="{787ECD41-0511-49CF-9DE9-CF7B1A97A83F}" type="datetimeFigureOut">
               <a:rPr lang="ru-RU" smtClean="0"/>
-              <a:t>26.09.2026</a:t>
+              <a:t>31.10.2026</a:t>
             </a:fld>
             <a:endParaRPr lang="ru-RU"/>
           </a:p>
@@ -4796,7 +5676,7 @@
           <a:p>
             <a:fld id="{787ECD41-0511-49CF-9DE9-CF7B1A97A83F}" type="datetimeFigureOut">
               <a:rPr lang="ru-RU" smtClean="0"/>
-              <a:t>26.09.2026</a:t>
+              <a:t>31.10.2026</a:t>
             </a:fld>
             <a:endParaRPr lang="ru-RU"/>
           </a:p>
@@ -5071,7 +5951,7 @@
           <a:p>
             <a:fld id="{787ECD41-0511-49CF-9DE9-CF7B1A97A83F}" type="datetimeFigureOut">
               <a:rPr lang="ru-RU" smtClean="0"/>
-              <a:t>26.09.2026</a:t>
+              <a:t>31.10.2026</a:t>
             </a:fld>
             <a:endParaRPr lang="ru-RU"/>
           </a:p>
@@ -5323,7 +6203,7 @@
           <a:p>
             <a:fld id="{787ECD41-0511-49CF-9DE9-CF7B1A97A83F}" type="datetimeFigureOut">
               <a:rPr lang="ru-RU" smtClean="0"/>
-              <a:t>26.09.2026</a:t>
+              <a:t>31.10.2026</a:t>
             </a:fld>
             <a:endParaRPr lang="ru-RU"/>
           </a:p>
@@ -5534,7 +6414,7 @@
           <a:p>
             <a:fld id="{787ECD41-0511-49CF-9DE9-CF7B1A97A83F}" type="datetimeFigureOut">
               <a:rPr lang="ru-RU" smtClean="0"/>
-              <a:t>26.09.2026</a:t>
+              <a:t>31.10.2026</a:t>
             </a:fld>
             <a:endParaRPr lang="ru-RU"/>
           </a:p>
@@ -6410,12 +7290,18 @@
 </p:sld>
 </file>
 
-<file path=ppt/slides/slide2.xml><?xml version="1.0" encoding="utf-8"?>
+<file path=ppt/slides/slide10.xml><?xml version="1.0" encoding="utf-8"?>
 <p:sld xmlns:a="http://schemas.openxmlformats.org/drawingml/2006/main" xmlns:r="http://schemas.openxmlformats.org/officeDocument/2006/relationships" xmlns:p="http://schemas.openxmlformats.org/presentationml/2006/main">
   <p:cSld>
     <p:spTree>
       <p:nvGrpSpPr>
-        <p:cNvPr id="1" name=""/>
+        <p:cNvPr id="1" name="">
+          <a:extLst>
+            <a:ext uri="{FF2B5EF4-FFF2-40B4-BE49-F238E27FC236}">
+              <a16:creationId xmlns:a16="http://schemas.microsoft.com/office/drawing/2014/main" id="{ADD83462-C44A-E756-5F31-CCF979A848C4}"/>
+            </a:ext>
+          </a:extLst>
+        </p:cNvPr>
         <p:cNvGrpSpPr/>
         <p:nvPr/>
       </p:nvGrpSpPr>
@@ -6429,7 +7315,13 @@
       </p:grpSpPr>
       <p:pic>
         <p:nvPicPr>
-          <p:cNvPr id="2075" name="Рисунок 2074"/>
+          <p:cNvPr id="13" name="Рисунок 12">
+            <a:extLst>
+              <a:ext uri="{FF2B5EF4-FFF2-40B4-BE49-F238E27FC236}">
+                <a16:creationId xmlns:a16="http://schemas.microsoft.com/office/drawing/2014/main" id="{50258CCB-55B1-A323-9317-09DDF5D37102}"/>
+              </a:ext>
+            </a:extLst>
+          </p:cNvPr>
           <p:cNvPicPr>
             <a:picLocks noChangeAspect="1"/>
           </p:cNvPicPr>
@@ -6457,232 +7349,12 @@
           </a:prstGeom>
         </p:spPr>
       </p:pic>
-      <p:sp>
-        <p:nvSpPr>
-          <p:cNvPr id="5" name="Rectangle 6"/>
-          <p:cNvSpPr>
-            <a:spLocks noChangeArrowheads="1"/>
-          </p:cNvSpPr>
-          <p:nvPr/>
-        </p:nvSpPr>
-        <p:spPr bwMode="auto">
-          <a:xfrm>
-            <a:off x="485775" y="412750"/>
-            <a:ext cx="3544240" cy="846386"/>
-          </a:xfrm>
-          <a:prstGeom prst="rect">
-            <a:avLst/>
-          </a:prstGeom>
-          <a:noFill/>
-          <a:ln>
-            <a:noFill/>
-          </a:ln>
-          <a:extLst>
-            <a:ext uri="{909E8E84-426E-40DD-AFC4-6F175D3DCCD1}">
-              <a14:hiddenFill xmlns:a14="http://schemas.microsoft.com/office/drawing/2010/main">
-                <a:solidFill>
-                  <a:srgbClr val="FFFFFF"/>
-                </a:solidFill>
-              </a14:hiddenFill>
-            </a:ext>
-            <a:ext uri="{91240B29-F687-4F45-9708-019B960494DF}">
-              <a14:hiddenLine xmlns:a14="http://schemas.microsoft.com/office/drawing/2010/main" w="9525">
-                <a:solidFill>
-                  <a:srgbClr val="000000"/>
-                </a:solidFill>
-                <a:miter lim="800000"/>
-                <a:headEnd/>
-                <a:tailEnd/>
-              </a14:hiddenLine>
-            </a:ext>
-          </a:extLst>
-        </p:spPr>
-        <p:txBody>
-          <a:bodyPr vert="horz" wrap="none" lIns="0" tIns="0" rIns="0" bIns="0" numCol="1" anchor="t" anchorCtr="0" compatLnSpc="1">
-            <a:prstTxWarp prst="textNoShape">
-              <a:avLst/>
-            </a:prstTxWarp>
-            <a:spAutoFit/>
-          </a:bodyPr>
-          <a:lstStyle>
-            <a:lvl1pPr eaLnBrk="0" fontAlgn="base" hangingPunct="0">
-              <a:spcBef>
-                <a:spcPct val="0"/>
-              </a:spcBef>
-              <a:spcAft>
-                <a:spcPct val="0"/>
-              </a:spcAft>
-              <a:defRPr>
-                <a:solidFill>
-                  <a:schemeClr val="tx1"/>
-                </a:solidFill>
-                <a:latin typeface="Arial" panose="020B0604020202020204" pitchFamily="34" charset="0"/>
-              </a:defRPr>
-            </a:lvl1pPr>
-            <a:lvl2pPr eaLnBrk="0" fontAlgn="base" hangingPunct="0">
-              <a:spcBef>
-                <a:spcPct val="0"/>
-              </a:spcBef>
-              <a:spcAft>
-                <a:spcPct val="0"/>
-              </a:spcAft>
-              <a:defRPr>
-                <a:solidFill>
-                  <a:schemeClr val="tx1"/>
-                </a:solidFill>
-                <a:latin typeface="Arial" panose="020B0604020202020204" pitchFamily="34" charset="0"/>
-              </a:defRPr>
-            </a:lvl2pPr>
-            <a:lvl3pPr eaLnBrk="0" fontAlgn="base" hangingPunct="0">
-              <a:spcBef>
-                <a:spcPct val="0"/>
-              </a:spcBef>
-              <a:spcAft>
-                <a:spcPct val="0"/>
-              </a:spcAft>
-              <a:defRPr>
-                <a:solidFill>
-                  <a:schemeClr val="tx1"/>
-                </a:solidFill>
-                <a:latin typeface="Arial" panose="020B0604020202020204" pitchFamily="34" charset="0"/>
-              </a:defRPr>
-            </a:lvl3pPr>
-            <a:lvl4pPr eaLnBrk="0" fontAlgn="base" hangingPunct="0">
-              <a:spcBef>
-                <a:spcPct val="0"/>
-              </a:spcBef>
-              <a:spcAft>
-                <a:spcPct val="0"/>
-              </a:spcAft>
-              <a:defRPr>
-                <a:solidFill>
-                  <a:schemeClr val="tx1"/>
-                </a:solidFill>
-                <a:latin typeface="Arial" panose="020B0604020202020204" pitchFamily="34" charset="0"/>
-              </a:defRPr>
-            </a:lvl4pPr>
-            <a:lvl5pPr eaLnBrk="0" fontAlgn="base" hangingPunct="0">
-              <a:spcBef>
-                <a:spcPct val="0"/>
-              </a:spcBef>
-              <a:spcAft>
-                <a:spcPct val="0"/>
-              </a:spcAft>
-              <a:defRPr>
-                <a:solidFill>
-                  <a:schemeClr val="tx1"/>
-                </a:solidFill>
-                <a:latin typeface="Arial" panose="020B0604020202020204" pitchFamily="34" charset="0"/>
-              </a:defRPr>
-            </a:lvl5pPr>
-            <a:lvl6pPr eaLnBrk="0" fontAlgn="base" hangingPunct="0">
-              <a:spcBef>
-                <a:spcPct val="0"/>
-              </a:spcBef>
-              <a:spcAft>
-                <a:spcPct val="0"/>
-              </a:spcAft>
-              <a:defRPr>
-                <a:solidFill>
-                  <a:schemeClr val="tx1"/>
-                </a:solidFill>
-                <a:latin typeface="Arial" panose="020B0604020202020204" pitchFamily="34" charset="0"/>
-              </a:defRPr>
-            </a:lvl6pPr>
-            <a:lvl7pPr eaLnBrk="0" fontAlgn="base" hangingPunct="0">
-              <a:spcBef>
-                <a:spcPct val="0"/>
-              </a:spcBef>
-              <a:spcAft>
-                <a:spcPct val="0"/>
-              </a:spcAft>
-              <a:defRPr>
-                <a:solidFill>
-                  <a:schemeClr val="tx1"/>
-                </a:solidFill>
-                <a:latin typeface="Arial" panose="020B0604020202020204" pitchFamily="34" charset="0"/>
-              </a:defRPr>
-            </a:lvl7pPr>
-            <a:lvl8pPr eaLnBrk="0" fontAlgn="base" hangingPunct="0">
-              <a:spcBef>
-                <a:spcPct val="0"/>
-              </a:spcBef>
-              <a:spcAft>
-                <a:spcPct val="0"/>
-              </a:spcAft>
-              <a:defRPr>
-                <a:solidFill>
-                  <a:schemeClr val="tx1"/>
-                </a:solidFill>
-                <a:latin typeface="Arial" panose="020B0604020202020204" pitchFamily="34" charset="0"/>
-              </a:defRPr>
-            </a:lvl8pPr>
-            <a:lvl9pPr eaLnBrk="0" fontAlgn="base" hangingPunct="0">
-              <a:spcBef>
-                <a:spcPct val="0"/>
-              </a:spcBef>
-              <a:spcAft>
-                <a:spcPct val="0"/>
-              </a:spcAft>
-              <a:defRPr>
-                <a:solidFill>
-                  <a:schemeClr val="tx1"/>
-                </a:solidFill>
-                <a:latin typeface="Arial" panose="020B0604020202020204" pitchFamily="34" charset="0"/>
-              </a:defRPr>
-            </a:lvl9pPr>
-          </a:lstStyle>
-          <a:p>
-            <a:pPr marL="0" marR="0" lvl="0" indent="0" algn="l" defTabSz="914400" rtl="0" eaLnBrk="0" fontAlgn="base" latinLnBrk="0" hangingPunct="0">
-              <a:lnSpc>
-                <a:spcPct val="100000"/>
-              </a:lnSpc>
-              <a:spcBef>
-                <a:spcPct val="0"/>
-              </a:spcBef>
-              <a:spcAft>
-                <a:spcPct val="0"/>
-              </a:spcAft>
-              <a:buClrTx/>
-              <a:buSzTx/>
-              <a:buFontTx/>
-              <a:buNone/>
-              <a:tabLst/>
-            </a:pPr>
-            <a:r>
-              <a:rPr kumimoji="0" lang="en-US" altLang="ru-RU" sz="5500" b="1" i="0" u="none" strike="noStrike" cap="none" normalizeH="0" baseline="0" dirty="0">
-                <a:ln>
-                  <a:noFill/>
-                </a:ln>
-                <a:solidFill>
-                  <a:srgbClr val="000000"/>
-                </a:solidFill>
-                <a:effectLst/>
-                <a:latin typeface="Times New Roman" panose="02020603050405020304" pitchFamily="18" charset="0"/>
-                <a:cs typeface="Times New Roman" panose="02020603050405020304" pitchFamily="18" charset="0"/>
-              </a:rPr>
-              <a:t>Hello world</a:t>
-            </a:r>
-            <a:endParaRPr kumimoji="0" lang="ru-RU" altLang="ru-RU" sz="1800" b="0" i="0" u="none" strike="noStrike" cap="none" normalizeH="0" baseline="0" dirty="0">
-              <a:ln>
-                <a:noFill/>
-              </a:ln>
-              <a:solidFill>
-                <a:schemeClr val="tx1"/>
-              </a:solidFill>
-              <a:effectLst/>
-              <a:latin typeface="Times New Roman" panose="02020603050405020304" pitchFamily="18" charset="0"/>
-              <a:cs typeface="Times New Roman" panose="02020603050405020304" pitchFamily="18" charset="0"/>
-            </a:endParaRPr>
-          </a:p>
-        </p:txBody>
-      </p:sp>
       <p:pic>
         <p:nvPicPr>
-          <p:cNvPr id="7" name="Рисунок 6">
+          <p:cNvPr id="6" name="Рисунок 5">
             <a:extLst>
               <a:ext uri="{FF2B5EF4-FFF2-40B4-BE49-F238E27FC236}">
-                <a16:creationId xmlns:a16="http://schemas.microsoft.com/office/drawing/2014/main" id="{8E9CAA25-BE72-59B5-CA8A-85C6E9AC6FEC}"/>
+                <a16:creationId xmlns:a16="http://schemas.microsoft.com/office/drawing/2014/main" id="{51103E12-BBC8-488B-06B5-06697EF5D580}"/>
               </a:ext>
             </a:extLst>
           </p:cNvPr>
@@ -6699,18 +7371,48 @@
         </p:blipFill>
         <p:spPr>
           <a:xfrm>
-            <a:off x="485775" y="2028639"/>
-            <a:ext cx="6489412" cy="3079018"/>
+            <a:off x="550292" y="156897"/>
+            <a:ext cx="11091415" cy="6544205"/>
           </a:xfrm>
           <a:prstGeom prst="rect">
             <a:avLst/>
           </a:prstGeom>
+          <a:solidFill>
+            <a:srgbClr val="FFFFFF">
+              <a:shade val="85000"/>
+            </a:srgbClr>
+          </a:solidFill>
+          <a:ln w="88900" cap="sq">
+            <a:solidFill>
+              <a:srgbClr val="FFFFFF"/>
+            </a:solidFill>
+            <a:miter lim="800000"/>
+          </a:ln>
+          <a:effectLst>
+            <a:outerShdw blurRad="55000" dist="18000" dir="5400000" algn="tl" rotWithShape="0">
+              <a:srgbClr val="000000">
+                <a:alpha val="40000"/>
+              </a:srgbClr>
+            </a:outerShdw>
+          </a:effectLst>
+          <a:scene3d>
+            <a:camera prst="orthographicFront"/>
+            <a:lightRig rig="twoPt" dir="t">
+              <a:rot lat="0" lon="0" rev="7200000"/>
+            </a:lightRig>
+          </a:scene3d>
+          <a:sp3d>
+            <a:bevelT w="25400" h="19050"/>
+            <a:contourClr>
+              <a:srgbClr val="FFFFFF"/>
+            </a:contourClr>
+          </a:sp3d>
         </p:spPr>
       </p:pic>
     </p:spTree>
     <p:extLst>
       <p:ext uri="{BB962C8B-B14F-4D97-AF65-F5344CB8AC3E}">
-        <p14:creationId xmlns:p14="http://schemas.microsoft.com/office/powerpoint/2010/main" val="2481352545"/>
+        <p14:creationId xmlns:p14="http://schemas.microsoft.com/office/powerpoint/2010/main" val="4039086328"/>
       </p:ext>
     </p:extLst>
   </p:cSld>
@@ -6720,7 +7422,7 @@
 </p:sld>
 </file>
 
-<file path=ppt/slides/slide3.xml><?xml version="1.0" encoding="utf-8"?>
+<file path=ppt/slides/slide11.xml><?xml version="1.0" encoding="utf-8"?>
 <p:sld xmlns:a="http://schemas.openxmlformats.org/drawingml/2006/main" xmlns:r="http://schemas.openxmlformats.org/officeDocument/2006/relationships" xmlns:p="http://schemas.openxmlformats.org/presentationml/2006/main">
   <p:cSld>
     <p:spTree>
@@ -6728,7 +7430,7 @@
         <p:cNvPr id="1" name="">
           <a:extLst>
             <a:ext uri="{FF2B5EF4-FFF2-40B4-BE49-F238E27FC236}">
-              <a16:creationId xmlns:a16="http://schemas.microsoft.com/office/drawing/2014/main" id="{7EE22715-A3BD-B2B6-1A22-DA9AFDCFC55F}"/>
+              <a16:creationId xmlns:a16="http://schemas.microsoft.com/office/drawing/2014/main" id="{ACCE4050-E237-4981-D621-05EB3980E43C}"/>
             </a:ext>
           </a:extLst>
         </p:cNvPr>
@@ -6745,10 +7447,10 @@
       </p:grpSpPr>
       <p:pic>
         <p:nvPicPr>
-          <p:cNvPr id="2075" name="Рисунок 2074">
+          <p:cNvPr id="13" name="Рисунок 12">
             <a:extLst>
               <a:ext uri="{FF2B5EF4-FFF2-40B4-BE49-F238E27FC236}">
-                <a16:creationId xmlns:a16="http://schemas.microsoft.com/office/drawing/2014/main" id="{2A0863C4-90A6-DFD6-DE14-700340AC2ED4}"/>
+                <a16:creationId xmlns:a16="http://schemas.microsoft.com/office/drawing/2014/main" id="{9B57D012-16DC-1159-1974-1F1C944DD1BD}"/>
               </a:ext>
             </a:extLst>
           </p:cNvPr>
@@ -6758,7 +7460,7 @@
           <p:nvPr/>
         </p:nvPicPr>
         <p:blipFill>
-          <a:blip r:embed="rId2">
+          <a:blip r:embed="rId3">
             <a:extLst>
               <a:ext uri="{28A0092B-C50C-407E-A947-70E740481C1C}">
                 <a14:useLocalDpi xmlns:a14="http://schemas.microsoft.com/office/drawing/2010/main" val="0"/>
@@ -6779,234 +7481,12 @@
           </a:prstGeom>
         </p:spPr>
       </p:pic>
-      <p:sp>
-        <p:nvSpPr>
-          <p:cNvPr id="5" name="Rectangle 6">
+      <p:pic>
+        <p:nvPicPr>
+          <p:cNvPr id="5" name="Рисунок 4">
             <a:extLst>
               <a:ext uri="{FF2B5EF4-FFF2-40B4-BE49-F238E27FC236}">
-                <a16:creationId xmlns:a16="http://schemas.microsoft.com/office/drawing/2014/main" id="{D0C0EC3F-B906-FD0E-3D0A-8323D103FC5C}"/>
-              </a:ext>
-            </a:extLst>
-          </p:cNvPr>
-          <p:cNvSpPr>
-            <a:spLocks noChangeArrowheads="1"/>
-          </p:cNvSpPr>
-          <p:nvPr/>
-        </p:nvSpPr>
-        <p:spPr bwMode="auto">
-          <a:xfrm>
-            <a:off x="485775" y="412750"/>
-            <a:ext cx="4411592" cy="846386"/>
-          </a:xfrm>
-          <a:prstGeom prst="rect">
-            <a:avLst/>
-          </a:prstGeom>
-          <a:noFill/>
-          <a:ln>
-            <a:noFill/>
-          </a:ln>
-          <a:extLst>
-            <a:ext uri="{909E8E84-426E-40DD-AFC4-6F175D3DCCD1}">
-              <a14:hiddenFill xmlns:a14="http://schemas.microsoft.com/office/drawing/2010/main">
-                <a:solidFill>
-                  <a:srgbClr val="FFFFFF"/>
-                </a:solidFill>
-              </a14:hiddenFill>
-            </a:ext>
-            <a:ext uri="{91240B29-F687-4F45-9708-019B960494DF}">
-              <a14:hiddenLine xmlns:a14="http://schemas.microsoft.com/office/drawing/2010/main" w="9525">
-                <a:solidFill>
-                  <a:srgbClr val="000000"/>
-                </a:solidFill>
-                <a:miter lim="800000"/>
-                <a:headEnd/>
-                <a:tailEnd/>
-              </a14:hiddenLine>
-            </a:ext>
-          </a:extLst>
-        </p:spPr>
-        <p:txBody>
-          <a:bodyPr vert="horz" wrap="none" lIns="0" tIns="0" rIns="0" bIns="0" numCol="1" anchor="t" anchorCtr="0" compatLnSpc="1">
-            <a:prstTxWarp prst="textNoShape">
-              <a:avLst/>
-            </a:prstTxWarp>
-            <a:spAutoFit/>
-          </a:bodyPr>
-          <a:lstStyle>
-            <a:lvl1pPr eaLnBrk="0" fontAlgn="base" hangingPunct="0">
-              <a:spcBef>
-                <a:spcPct val="0"/>
-              </a:spcBef>
-              <a:spcAft>
-                <a:spcPct val="0"/>
-              </a:spcAft>
-              <a:defRPr>
-                <a:solidFill>
-                  <a:schemeClr val="tx1"/>
-                </a:solidFill>
-                <a:latin typeface="Arial" panose="020B0604020202020204" pitchFamily="34" charset="0"/>
-              </a:defRPr>
-            </a:lvl1pPr>
-            <a:lvl2pPr eaLnBrk="0" fontAlgn="base" hangingPunct="0">
-              <a:spcBef>
-                <a:spcPct val="0"/>
-              </a:spcBef>
-              <a:spcAft>
-                <a:spcPct val="0"/>
-              </a:spcAft>
-              <a:defRPr>
-                <a:solidFill>
-                  <a:schemeClr val="tx1"/>
-                </a:solidFill>
-                <a:latin typeface="Arial" panose="020B0604020202020204" pitchFamily="34" charset="0"/>
-              </a:defRPr>
-            </a:lvl2pPr>
-            <a:lvl3pPr eaLnBrk="0" fontAlgn="base" hangingPunct="0">
-              <a:spcBef>
-                <a:spcPct val="0"/>
-              </a:spcBef>
-              <a:spcAft>
-                <a:spcPct val="0"/>
-              </a:spcAft>
-              <a:defRPr>
-                <a:solidFill>
-                  <a:schemeClr val="tx1"/>
-                </a:solidFill>
-                <a:latin typeface="Arial" panose="020B0604020202020204" pitchFamily="34" charset="0"/>
-              </a:defRPr>
-            </a:lvl3pPr>
-            <a:lvl4pPr eaLnBrk="0" fontAlgn="base" hangingPunct="0">
-              <a:spcBef>
-                <a:spcPct val="0"/>
-              </a:spcBef>
-              <a:spcAft>
-                <a:spcPct val="0"/>
-              </a:spcAft>
-              <a:defRPr>
-                <a:solidFill>
-                  <a:schemeClr val="tx1"/>
-                </a:solidFill>
-                <a:latin typeface="Arial" panose="020B0604020202020204" pitchFamily="34" charset="0"/>
-              </a:defRPr>
-            </a:lvl4pPr>
-            <a:lvl5pPr eaLnBrk="0" fontAlgn="base" hangingPunct="0">
-              <a:spcBef>
-                <a:spcPct val="0"/>
-              </a:spcBef>
-              <a:spcAft>
-                <a:spcPct val="0"/>
-              </a:spcAft>
-              <a:defRPr>
-                <a:solidFill>
-                  <a:schemeClr val="tx1"/>
-                </a:solidFill>
-                <a:latin typeface="Arial" panose="020B0604020202020204" pitchFamily="34" charset="0"/>
-              </a:defRPr>
-            </a:lvl5pPr>
-            <a:lvl6pPr eaLnBrk="0" fontAlgn="base" hangingPunct="0">
-              <a:spcBef>
-                <a:spcPct val="0"/>
-              </a:spcBef>
-              <a:spcAft>
-                <a:spcPct val="0"/>
-              </a:spcAft>
-              <a:defRPr>
-                <a:solidFill>
-                  <a:schemeClr val="tx1"/>
-                </a:solidFill>
-                <a:latin typeface="Arial" panose="020B0604020202020204" pitchFamily="34" charset="0"/>
-              </a:defRPr>
-            </a:lvl6pPr>
-            <a:lvl7pPr eaLnBrk="0" fontAlgn="base" hangingPunct="0">
-              <a:spcBef>
-                <a:spcPct val="0"/>
-              </a:spcBef>
-              <a:spcAft>
-                <a:spcPct val="0"/>
-              </a:spcAft>
-              <a:defRPr>
-                <a:solidFill>
-                  <a:schemeClr val="tx1"/>
-                </a:solidFill>
-                <a:latin typeface="Arial" panose="020B0604020202020204" pitchFamily="34" charset="0"/>
-              </a:defRPr>
-            </a:lvl7pPr>
-            <a:lvl8pPr eaLnBrk="0" fontAlgn="base" hangingPunct="0">
-              <a:spcBef>
-                <a:spcPct val="0"/>
-              </a:spcBef>
-              <a:spcAft>
-                <a:spcPct val="0"/>
-              </a:spcAft>
-              <a:defRPr>
-                <a:solidFill>
-                  <a:schemeClr val="tx1"/>
-                </a:solidFill>
-                <a:latin typeface="Arial" panose="020B0604020202020204" pitchFamily="34" charset="0"/>
-              </a:defRPr>
-            </a:lvl8pPr>
-            <a:lvl9pPr eaLnBrk="0" fontAlgn="base" hangingPunct="0">
-              <a:spcBef>
-                <a:spcPct val="0"/>
-              </a:spcBef>
-              <a:spcAft>
-                <a:spcPct val="0"/>
-              </a:spcAft>
-              <a:defRPr>
-                <a:solidFill>
-                  <a:schemeClr val="tx1"/>
-                </a:solidFill>
-                <a:latin typeface="Arial" panose="020B0604020202020204" pitchFamily="34" charset="0"/>
-              </a:defRPr>
-            </a:lvl9pPr>
-          </a:lstStyle>
-          <a:p>
-            <a:pPr marL="0" marR="0" lvl="0" indent="0" algn="l" defTabSz="914400" rtl="0" eaLnBrk="0" fontAlgn="base" latinLnBrk="0" hangingPunct="0">
-              <a:lnSpc>
-                <a:spcPct val="100000"/>
-              </a:lnSpc>
-              <a:spcBef>
-                <a:spcPct val="0"/>
-              </a:spcBef>
-              <a:spcAft>
-                <a:spcPct val="0"/>
-              </a:spcAft>
-              <a:buClrTx/>
-              <a:buSzTx/>
-              <a:buFontTx/>
-              <a:buNone/>
-              <a:tabLst/>
-            </a:pPr>
-            <a:r>
-              <a:rPr lang="ru-RU" altLang="ru-RU" sz="5500" b="1" dirty="0">
-                <a:solidFill>
-                  <a:srgbClr val="000000"/>
-                </a:solidFill>
-                <a:latin typeface="Times New Roman" panose="02020603050405020304" pitchFamily="18" charset="0"/>
-                <a:cs typeface="Times New Roman" panose="02020603050405020304" pitchFamily="18" charset="0"/>
-              </a:rPr>
-              <a:t>Комментарии</a:t>
-            </a:r>
-            <a:endParaRPr kumimoji="0" lang="ru-RU" altLang="ru-RU" sz="1800" b="0" i="0" u="none" strike="noStrike" cap="none" normalizeH="0" baseline="0" dirty="0">
-              <a:ln>
-                <a:noFill/>
-              </a:ln>
-              <a:solidFill>
-                <a:schemeClr val="tx1"/>
-              </a:solidFill>
-              <a:effectLst/>
-              <a:latin typeface="Times New Roman" panose="02020603050405020304" pitchFamily="18" charset="0"/>
-              <a:cs typeface="Times New Roman" panose="02020603050405020304" pitchFamily="18" charset="0"/>
-            </a:endParaRPr>
-          </a:p>
-        </p:txBody>
-      </p:sp>
-      <p:pic>
-        <p:nvPicPr>
-          <p:cNvPr id="9" name="Рисунок 8">
-            <a:extLst>
-              <a:ext uri="{FF2B5EF4-FFF2-40B4-BE49-F238E27FC236}">
-                <a16:creationId xmlns:a16="http://schemas.microsoft.com/office/drawing/2014/main" id="{2EECF15F-51F1-5039-71F4-E73E85D64528}"/>
+                <a16:creationId xmlns:a16="http://schemas.microsoft.com/office/drawing/2014/main" id="{797CE1C0-B089-B4BE-97ED-76A65979DC1F}"/>
               </a:ext>
             </a:extLst>
           </p:cNvPr>
@@ -7016,25 +7496,55 @@
           <p:nvPr/>
         </p:nvPicPr>
         <p:blipFill>
-          <a:blip r:embed="rId3"/>
+          <a:blip r:embed="rId4"/>
           <a:stretch>
             <a:fillRect/>
           </a:stretch>
         </p:blipFill>
         <p:spPr>
           <a:xfrm>
-            <a:off x="485775" y="1671886"/>
-            <a:ext cx="6355567" cy="4726754"/>
+            <a:off x="2660796" y="246553"/>
+            <a:ext cx="6870407" cy="6364893"/>
           </a:xfrm>
           <a:prstGeom prst="rect">
             <a:avLst/>
           </a:prstGeom>
+          <a:solidFill>
+            <a:srgbClr val="FFFFFF">
+              <a:shade val="85000"/>
+            </a:srgbClr>
+          </a:solidFill>
+          <a:ln w="88900" cap="sq">
+            <a:solidFill>
+              <a:srgbClr val="FFFFFF"/>
+            </a:solidFill>
+            <a:miter lim="800000"/>
+          </a:ln>
+          <a:effectLst>
+            <a:outerShdw blurRad="55000" dist="18000" dir="5400000" algn="tl" rotWithShape="0">
+              <a:srgbClr val="000000">
+                <a:alpha val="40000"/>
+              </a:srgbClr>
+            </a:outerShdw>
+          </a:effectLst>
+          <a:scene3d>
+            <a:camera prst="orthographicFront"/>
+            <a:lightRig rig="twoPt" dir="t">
+              <a:rot lat="0" lon="0" rev="7200000"/>
+            </a:lightRig>
+          </a:scene3d>
+          <a:sp3d>
+            <a:bevelT w="25400" h="19050"/>
+            <a:contourClr>
+              <a:srgbClr val="FFFFFF"/>
+            </a:contourClr>
+          </a:sp3d>
         </p:spPr>
       </p:pic>
     </p:spTree>
     <p:extLst>
       <p:ext uri="{BB962C8B-B14F-4D97-AF65-F5344CB8AC3E}">
-        <p14:creationId xmlns:p14="http://schemas.microsoft.com/office/powerpoint/2010/main" val="1852719548"/>
+        <p14:creationId xmlns:p14="http://schemas.microsoft.com/office/powerpoint/2010/main" val="2105230032"/>
       </p:ext>
     </p:extLst>
   </p:cSld>
@@ -7044,7 +7554,7 @@
 </p:sld>
 </file>
 
-<file path=ppt/slides/slide4.xml><?xml version="1.0" encoding="utf-8"?>
+<file path=ppt/slides/slide12.xml><?xml version="1.0" encoding="utf-8"?>
 <p:sld xmlns:a="http://schemas.openxmlformats.org/drawingml/2006/main" xmlns:r="http://schemas.openxmlformats.org/officeDocument/2006/relationships" xmlns:p="http://schemas.openxmlformats.org/presentationml/2006/main">
   <p:cSld>
     <p:spTree>
@@ -7327,8 +7837,8 @@
         </p:blipFill>
         <p:spPr bwMode="auto">
           <a:xfrm>
-            <a:off x="420687" y="1479537"/>
-            <a:ext cx="3901147" cy="1120924"/>
+            <a:off x="420688" y="1479537"/>
+            <a:ext cx="2839348" cy="1120924"/>
           </a:xfrm>
           <a:prstGeom prst="rect">
             <a:avLst/>
@@ -7375,7 +7885,7 @@
         <p:spPr bwMode="auto">
           <a:xfrm>
             <a:off x="513750" y="1763000"/>
-            <a:ext cx="3655949" cy="553998"/>
+            <a:ext cx="3901147" cy="553998"/>
           </a:xfrm>
           <a:prstGeom prst="rect">
             <a:avLst/>
@@ -7560,64 +8070,14 @@
               </a:rPr>
             </a:br>
             <a:r>
-              <a:rPr lang="ru-RU" dirty="0" err="1">
+              <a:rPr lang="ru-RU" dirty="0">
                 <a:solidFill>
                   <a:schemeClr val="bg1"/>
                 </a:solidFill>
                 <a:latin typeface="Times New Roman" panose="02020603050405020304" pitchFamily="18" charset="0"/>
                 <a:cs typeface="Times New Roman" panose="02020603050405020304" pitchFamily="18" charset="0"/>
               </a:rPr>
-              <a:t>variableType</a:t>
-            </a:r>
-            <a:r>
-              <a:rPr lang="ru-RU" dirty="0">
-                <a:solidFill>
-                  <a:schemeClr val="bg1"/>
-                </a:solidFill>
-                <a:latin typeface="Times New Roman" panose="02020603050405020304" pitchFamily="18" charset="0"/>
-                <a:cs typeface="Times New Roman" panose="02020603050405020304" pitchFamily="18" charset="0"/>
-              </a:rPr>
-              <a:t> </a:t>
-            </a:r>
-            <a:r>
-              <a:rPr lang="ru-RU" dirty="0" err="1">
-                <a:solidFill>
-                  <a:schemeClr val="bg1"/>
-                </a:solidFill>
-                <a:latin typeface="Times New Roman" panose="02020603050405020304" pitchFamily="18" charset="0"/>
-                <a:cs typeface="Times New Roman" panose="02020603050405020304" pitchFamily="18" charset="0"/>
-              </a:rPr>
-              <a:t>variableName</a:t>
-            </a:r>
-            <a:r>
-              <a:rPr lang="ru-RU" dirty="0">
-                <a:solidFill>
-                  <a:schemeClr val="bg1"/>
-                </a:solidFill>
-                <a:latin typeface="Times New Roman" panose="02020603050405020304" pitchFamily="18" charset="0"/>
-                <a:cs typeface="Times New Roman" panose="02020603050405020304" pitchFamily="18" charset="0"/>
-              </a:rPr>
-              <a:t> = </a:t>
-            </a:r>
-            <a:r>
-              <a:rPr lang="ru-RU" dirty="0" err="1">
-                <a:solidFill>
-                  <a:schemeClr val="bg1"/>
-                </a:solidFill>
-                <a:latin typeface="Times New Roman" panose="02020603050405020304" pitchFamily="18" charset="0"/>
-                <a:cs typeface="Times New Roman" panose="02020603050405020304" pitchFamily="18" charset="0"/>
-              </a:rPr>
-              <a:t>value</a:t>
-            </a:r>
-            <a:r>
-              <a:rPr lang="ru-RU" dirty="0">
-                <a:solidFill>
-                  <a:schemeClr val="bg1"/>
-                </a:solidFill>
-                <a:latin typeface="Times New Roman" panose="02020603050405020304" pitchFamily="18" charset="0"/>
-                <a:cs typeface="Times New Roman" panose="02020603050405020304" pitchFamily="18" charset="0"/>
-              </a:rPr>
-              <a:t>;</a:t>
+              <a:t>тип название = значение;</a:t>
             </a:r>
           </a:p>
         </p:txBody>
@@ -8239,10 +8699,10 @@
       </p:graphicFrame>
       <p:pic>
         <p:nvPicPr>
-          <p:cNvPr id="17" name="Рисунок 16">
+          <p:cNvPr id="4" name="Рисунок 3">
             <a:extLst>
               <a:ext uri="{FF2B5EF4-FFF2-40B4-BE49-F238E27FC236}">
-                <a16:creationId xmlns:a16="http://schemas.microsoft.com/office/drawing/2014/main" id="{15210AAD-3125-2482-728A-02779A923C76}"/>
+                <a16:creationId xmlns:a16="http://schemas.microsoft.com/office/drawing/2014/main" id="{2C50034C-A5B7-34D2-C8E1-0D249ED41AFB}"/>
               </a:ext>
             </a:extLst>
           </p:cNvPr>
@@ -8259,8 +8719,8 @@
         </p:blipFill>
         <p:spPr>
           <a:xfrm>
-            <a:off x="5428978" y="1906242"/>
-            <a:ext cx="6249272" cy="3982006"/>
+            <a:off x="4742521" y="1628624"/>
+            <a:ext cx="7229250" cy="4618053"/>
           </a:xfrm>
           <a:prstGeom prst="rect">
             <a:avLst/>
@@ -8280,7 +8740,7 @@
 </p:sld>
 </file>
 
-<file path=ppt/slides/slide5.xml><?xml version="1.0" encoding="utf-8"?>
+<file path=ppt/slides/slide13.xml><?xml version="1.0" encoding="utf-8"?>
 <p:sld xmlns:a="http://schemas.openxmlformats.org/drawingml/2006/main" xmlns:r="http://schemas.openxmlformats.org/officeDocument/2006/relationships" xmlns:p="http://schemas.openxmlformats.org/presentationml/2006/main">
   <p:cSld>
     <p:spTree>
@@ -8565,7 +9025,7 @@
 </p:sld>
 </file>
 
-<file path=ppt/slides/slide6.xml><?xml version="1.0" encoding="utf-8"?>
+<file path=ppt/slides/slide14.xml><?xml version="1.0" encoding="utf-8"?>
 <p:sld xmlns:a="http://schemas.openxmlformats.org/drawingml/2006/main" xmlns:r="http://schemas.openxmlformats.org/officeDocument/2006/relationships" xmlns:p="http://schemas.openxmlformats.org/presentationml/2006/main">
   <p:cSld>
     <p:spTree>
@@ -9061,7 +9521,7 @@
 </p:sld>
 </file>
 
-<file path=ppt/slides/slide7.xml><?xml version="1.0" encoding="utf-8"?>
+<file path=ppt/slides/slide15.xml><?xml version="1.0" encoding="utf-8"?>
 <p:sld xmlns:a="http://schemas.openxmlformats.org/drawingml/2006/main" xmlns:r="http://schemas.openxmlformats.org/officeDocument/2006/relationships" xmlns:p="http://schemas.openxmlformats.org/presentationml/2006/main">
   <p:cSld>
     <p:spTree>
@@ -9895,7 +10355,7 @@
 </p:sld>
 </file>
 
-<file path=ppt/slides/slide8.xml><?xml version="1.0" encoding="utf-8"?>
+<file path=ppt/slides/slide16.xml><?xml version="1.0" encoding="utf-8"?>
 <p:sld xmlns:a="http://schemas.openxmlformats.org/drawingml/2006/main" xmlns:r="http://schemas.openxmlformats.org/officeDocument/2006/relationships" xmlns:p="http://schemas.openxmlformats.org/presentationml/2006/main">
   <p:cSld>
     <p:spTree>
@@ -10180,6 +10640,1846 @@
     <p:extLst>
       <p:ext uri="{BB962C8B-B14F-4D97-AF65-F5344CB8AC3E}">
         <p14:creationId xmlns:p14="http://schemas.microsoft.com/office/powerpoint/2010/main" val="2581744596"/>
+      </p:ext>
+    </p:extLst>
+  </p:cSld>
+  <p:clrMapOvr>
+    <a:masterClrMapping/>
+  </p:clrMapOvr>
+</p:sld>
+</file>
+
+<file path=ppt/slides/slide2.xml><?xml version="1.0" encoding="utf-8"?>
+<p:sld xmlns:a="http://schemas.openxmlformats.org/drawingml/2006/main" xmlns:r="http://schemas.openxmlformats.org/officeDocument/2006/relationships" xmlns:p="http://schemas.openxmlformats.org/presentationml/2006/main">
+  <p:cSld>
+    <p:spTree>
+      <p:nvGrpSpPr>
+        <p:cNvPr id="1" name=""/>
+        <p:cNvGrpSpPr/>
+        <p:nvPr/>
+      </p:nvGrpSpPr>
+      <p:grpSpPr>
+        <a:xfrm>
+          <a:off x="0" y="0"/>
+          <a:ext cx="0" cy="0"/>
+          <a:chOff x="0" y="0"/>
+          <a:chExt cx="0" cy="0"/>
+        </a:xfrm>
+      </p:grpSpPr>
+      <p:pic>
+        <p:nvPicPr>
+          <p:cNvPr id="2075" name="Рисунок 2074"/>
+          <p:cNvPicPr>
+            <a:picLocks noChangeAspect="1"/>
+          </p:cNvPicPr>
+          <p:nvPr/>
+        </p:nvPicPr>
+        <p:blipFill>
+          <a:blip r:embed="rId3">
+            <a:extLst>
+              <a:ext uri="{28A0092B-C50C-407E-A947-70E740481C1C}">
+                <a14:useLocalDpi xmlns:a14="http://schemas.microsoft.com/office/drawing/2010/main" val="0"/>
+              </a:ext>
+            </a:extLst>
+          </a:blip>
+          <a:stretch>
+            <a:fillRect/>
+          </a:stretch>
+        </p:blipFill>
+        <p:spPr>
+          <a:xfrm>
+            <a:off x="0" y="0"/>
+            <a:ext cx="12191999" cy="6858000"/>
+          </a:xfrm>
+          <a:prstGeom prst="rect">
+            <a:avLst/>
+          </a:prstGeom>
+        </p:spPr>
+      </p:pic>
+      <p:sp>
+        <p:nvSpPr>
+          <p:cNvPr id="5" name="Rectangle 6"/>
+          <p:cNvSpPr>
+            <a:spLocks noChangeArrowheads="1"/>
+          </p:cNvSpPr>
+          <p:nvPr/>
+        </p:nvSpPr>
+        <p:spPr bwMode="auto">
+          <a:xfrm>
+            <a:off x="485775" y="412750"/>
+            <a:ext cx="3544240" cy="846386"/>
+          </a:xfrm>
+          <a:prstGeom prst="rect">
+            <a:avLst/>
+          </a:prstGeom>
+          <a:noFill/>
+          <a:ln>
+            <a:noFill/>
+          </a:ln>
+          <a:extLst>
+            <a:ext uri="{909E8E84-426E-40DD-AFC4-6F175D3DCCD1}">
+              <a14:hiddenFill xmlns:a14="http://schemas.microsoft.com/office/drawing/2010/main">
+                <a:solidFill>
+                  <a:srgbClr val="FFFFFF"/>
+                </a:solidFill>
+              </a14:hiddenFill>
+            </a:ext>
+            <a:ext uri="{91240B29-F687-4F45-9708-019B960494DF}">
+              <a14:hiddenLine xmlns:a14="http://schemas.microsoft.com/office/drawing/2010/main" w="9525">
+                <a:solidFill>
+                  <a:srgbClr val="000000"/>
+                </a:solidFill>
+                <a:miter lim="800000"/>
+                <a:headEnd/>
+                <a:tailEnd/>
+              </a14:hiddenLine>
+            </a:ext>
+          </a:extLst>
+        </p:spPr>
+        <p:txBody>
+          <a:bodyPr vert="horz" wrap="none" lIns="0" tIns="0" rIns="0" bIns="0" numCol="1" anchor="t" anchorCtr="0" compatLnSpc="1">
+            <a:prstTxWarp prst="textNoShape">
+              <a:avLst/>
+            </a:prstTxWarp>
+            <a:spAutoFit/>
+          </a:bodyPr>
+          <a:lstStyle>
+            <a:lvl1pPr eaLnBrk="0" fontAlgn="base" hangingPunct="0">
+              <a:spcBef>
+                <a:spcPct val="0"/>
+              </a:spcBef>
+              <a:spcAft>
+                <a:spcPct val="0"/>
+              </a:spcAft>
+              <a:defRPr>
+                <a:solidFill>
+                  <a:schemeClr val="tx1"/>
+                </a:solidFill>
+                <a:latin typeface="Arial" panose="020B0604020202020204" pitchFamily="34" charset="0"/>
+              </a:defRPr>
+            </a:lvl1pPr>
+            <a:lvl2pPr eaLnBrk="0" fontAlgn="base" hangingPunct="0">
+              <a:spcBef>
+                <a:spcPct val="0"/>
+              </a:spcBef>
+              <a:spcAft>
+                <a:spcPct val="0"/>
+              </a:spcAft>
+              <a:defRPr>
+                <a:solidFill>
+                  <a:schemeClr val="tx1"/>
+                </a:solidFill>
+                <a:latin typeface="Arial" panose="020B0604020202020204" pitchFamily="34" charset="0"/>
+              </a:defRPr>
+            </a:lvl2pPr>
+            <a:lvl3pPr eaLnBrk="0" fontAlgn="base" hangingPunct="0">
+              <a:spcBef>
+                <a:spcPct val="0"/>
+              </a:spcBef>
+              <a:spcAft>
+                <a:spcPct val="0"/>
+              </a:spcAft>
+              <a:defRPr>
+                <a:solidFill>
+                  <a:schemeClr val="tx1"/>
+                </a:solidFill>
+                <a:latin typeface="Arial" panose="020B0604020202020204" pitchFamily="34" charset="0"/>
+              </a:defRPr>
+            </a:lvl3pPr>
+            <a:lvl4pPr eaLnBrk="0" fontAlgn="base" hangingPunct="0">
+              <a:spcBef>
+                <a:spcPct val="0"/>
+              </a:spcBef>
+              <a:spcAft>
+                <a:spcPct val="0"/>
+              </a:spcAft>
+              <a:defRPr>
+                <a:solidFill>
+                  <a:schemeClr val="tx1"/>
+                </a:solidFill>
+                <a:latin typeface="Arial" panose="020B0604020202020204" pitchFamily="34" charset="0"/>
+              </a:defRPr>
+            </a:lvl4pPr>
+            <a:lvl5pPr eaLnBrk="0" fontAlgn="base" hangingPunct="0">
+              <a:spcBef>
+                <a:spcPct val="0"/>
+              </a:spcBef>
+              <a:spcAft>
+                <a:spcPct val="0"/>
+              </a:spcAft>
+              <a:defRPr>
+                <a:solidFill>
+                  <a:schemeClr val="tx1"/>
+                </a:solidFill>
+                <a:latin typeface="Arial" panose="020B0604020202020204" pitchFamily="34" charset="0"/>
+              </a:defRPr>
+            </a:lvl5pPr>
+            <a:lvl6pPr eaLnBrk="0" fontAlgn="base" hangingPunct="0">
+              <a:spcBef>
+                <a:spcPct val="0"/>
+              </a:spcBef>
+              <a:spcAft>
+                <a:spcPct val="0"/>
+              </a:spcAft>
+              <a:defRPr>
+                <a:solidFill>
+                  <a:schemeClr val="tx1"/>
+                </a:solidFill>
+                <a:latin typeface="Arial" panose="020B0604020202020204" pitchFamily="34" charset="0"/>
+              </a:defRPr>
+            </a:lvl6pPr>
+            <a:lvl7pPr eaLnBrk="0" fontAlgn="base" hangingPunct="0">
+              <a:spcBef>
+                <a:spcPct val="0"/>
+              </a:spcBef>
+              <a:spcAft>
+                <a:spcPct val="0"/>
+              </a:spcAft>
+              <a:defRPr>
+                <a:solidFill>
+                  <a:schemeClr val="tx1"/>
+                </a:solidFill>
+                <a:latin typeface="Arial" panose="020B0604020202020204" pitchFamily="34" charset="0"/>
+              </a:defRPr>
+            </a:lvl7pPr>
+            <a:lvl8pPr eaLnBrk="0" fontAlgn="base" hangingPunct="0">
+              <a:spcBef>
+                <a:spcPct val="0"/>
+              </a:spcBef>
+              <a:spcAft>
+                <a:spcPct val="0"/>
+              </a:spcAft>
+              <a:defRPr>
+                <a:solidFill>
+                  <a:schemeClr val="tx1"/>
+                </a:solidFill>
+                <a:latin typeface="Arial" panose="020B0604020202020204" pitchFamily="34" charset="0"/>
+              </a:defRPr>
+            </a:lvl8pPr>
+            <a:lvl9pPr eaLnBrk="0" fontAlgn="base" hangingPunct="0">
+              <a:spcBef>
+                <a:spcPct val="0"/>
+              </a:spcBef>
+              <a:spcAft>
+                <a:spcPct val="0"/>
+              </a:spcAft>
+              <a:defRPr>
+                <a:solidFill>
+                  <a:schemeClr val="tx1"/>
+                </a:solidFill>
+                <a:latin typeface="Arial" panose="020B0604020202020204" pitchFamily="34" charset="0"/>
+              </a:defRPr>
+            </a:lvl9pPr>
+          </a:lstStyle>
+          <a:p>
+            <a:pPr marL="0" marR="0" lvl="0" indent="0" algn="l" defTabSz="914400" rtl="0" eaLnBrk="0" fontAlgn="base" latinLnBrk="0" hangingPunct="0">
+              <a:lnSpc>
+                <a:spcPct val="100000"/>
+              </a:lnSpc>
+              <a:spcBef>
+                <a:spcPct val="0"/>
+              </a:spcBef>
+              <a:spcAft>
+                <a:spcPct val="0"/>
+              </a:spcAft>
+              <a:buClrTx/>
+              <a:buSzTx/>
+              <a:buFontTx/>
+              <a:buNone/>
+              <a:tabLst/>
+            </a:pPr>
+            <a:r>
+              <a:rPr kumimoji="0" lang="en-US" altLang="ru-RU" sz="5500" b="1" i="0" u="none" strike="noStrike" cap="none" normalizeH="0" baseline="0" dirty="0">
+                <a:ln>
+                  <a:noFill/>
+                </a:ln>
+                <a:solidFill>
+                  <a:srgbClr val="000000"/>
+                </a:solidFill>
+                <a:effectLst/>
+                <a:latin typeface="Times New Roman" panose="02020603050405020304" pitchFamily="18" charset="0"/>
+                <a:cs typeface="Times New Roman" panose="02020603050405020304" pitchFamily="18" charset="0"/>
+              </a:rPr>
+              <a:t>Hello world</a:t>
+            </a:r>
+            <a:endParaRPr kumimoji="0" lang="ru-RU" altLang="ru-RU" sz="1800" b="0" i="0" u="none" strike="noStrike" cap="none" normalizeH="0" baseline="0" dirty="0">
+              <a:ln>
+                <a:noFill/>
+              </a:ln>
+              <a:solidFill>
+                <a:schemeClr val="tx1"/>
+              </a:solidFill>
+              <a:effectLst/>
+              <a:latin typeface="Times New Roman" panose="02020603050405020304" pitchFamily="18" charset="0"/>
+              <a:cs typeface="Times New Roman" panose="02020603050405020304" pitchFamily="18" charset="0"/>
+            </a:endParaRPr>
+          </a:p>
+        </p:txBody>
+      </p:sp>
+      <p:pic>
+        <p:nvPicPr>
+          <p:cNvPr id="7" name="Рисунок 6">
+            <a:extLst>
+              <a:ext uri="{FF2B5EF4-FFF2-40B4-BE49-F238E27FC236}">
+                <a16:creationId xmlns:a16="http://schemas.microsoft.com/office/drawing/2014/main" id="{8E9CAA25-BE72-59B5-CA8A-85C6E9AC6FEC}"/>
+              </a:ext>
+            </a:extLst>
+          </p:cNvPr>
+          <p:cNvPicPr>
+            <a:picLocks noChangeAspect="1"/>
+          </p:cNvPicPr>
+          <p:nvPr/>
+        </p:nvPicPr>
+        <p:blipFill>
+          <a:blip r:embed="rId4"/>
+          <a:stretch>
+            <a:fillRect/>
+          </a:stretch>
+        </p:blipFill>
+        <p:spPr>
+          <a:xfrm>
+            <a:off x="485775" y="2028639"/>
+            <a:ext cx="6489412" cy="3079018"/>
+          </a:xfrm>
+          <a:prstGeom prst="rect">
+            <a:avLst/>
+          </a:prstGeom>
+        </p:spPr>
+      </p:pic>
+    </p:spTree>
+    <p:extLst>
+      <p:ext uri="{BB962C8B-B14F-4D97-AF65-F5344CB8AC3E}">
+        <p14:creationId xmlns:p14="http://schemas.microsoft.com/office/powerpoint/2010/main" val="2481352545"/>
+      </p:ext>
+    </p:extLst>
+  </p:cSld>
+  <p:clrMapOvr>
+    <a:masterClrMapping/>
+  </p:clrMapOvr>
+</p:sld>
+</file>
+
+<file path=ppt/slides/slide3.xml><?xml version="1.0" encoding="utf-8"?>
+<p:sld xmlns:a="http://schemas.openxmlformats.org/drawingml/2006/main" xmlns:r="http://schemas.openxmlformats.org/officeDocument/2006/relationships" xmlns:p="http://schemas.openxmlformats.org/presentationml/2006/main">
+  <p:cSld>
+    <p:spTree>
+      <p:nvGrpSpPr>
+        <p:cNvPr id="1" name="">
+          <a:extLst>
+            <a:ext uri="{FF2B5EF4-FFF2-40B4-BE49-F238E27FC236}">
+              <a16:creationId xmlns:a16="http://schemas.microsoft.com/office/drawing/2014/main" id="{7EE22715-A3BD-B2B6-1A22-DA9AFDCFC55F}"/>
+            </a:ext>
+          </a:extLst>
+        </p:cNvPr>
+        <p:cNvGrpSpPr/>
+        <p:nvPr/>
+      </p:nvGrpSpPr>
+      <p:grpSpPr>
+        <a:xfrm>
+          <a:off x="0" y="0"/>
+          <a:ext cx="0" cy="0"/>
+          <a:chOff x="0" y="0"/>
+          <a:chExt cx="0" cy="0"/>
+        </a:xfrm>
+      </p:grpSpPr>
+      <p:pic>
+        <p:nvPicPr>
+          <p:cNvPr id="2075" name="Рисунок 2074">
+            <a:extLst>
+              <a:ext uri="{FF2B5EF4-FFF2-40B4-BE49-F238E27FC236}">
+                <a16:creationId xmlns:a16="http://schemas.microsoft.com/office/drawing/2014/main" id="{2A0863C4-90A6-DFD6-DE14-700340AC2ED4}"/>
+              </a:ext>
+            </a:extLst>
+          </p:cNvPr>
+          <p:cNvPicPr>
+            <a:picLocks noChangeAspect="1"/>
+          </p:cNvPicPr>
+          <p:nvPr/>
+        </p:nvPicPr>
+        <p:blipFill>
+          <a:blip r:embed="rId2">
+            <a:extLst>
+              <a:ext uri="{28A0092B-C50C-407E-A947-70E740481C1C}">
+                <a14:useLocalDpi xmlns:a14="http://schemas.microsoft.com/office/drawing/2010/main" val="0"/>
+              </a:ext>
+            </a:extLst>
+          </a:blip>
+          <a:stretch>
+            <a:fillRect/>
+          </a:stretch>
+        </p:blipFill>
+        <p:spPr>
+          <a:xfrm>
+            <a:off x="0" y="0"/>
+            <a:ext cx="12191999" cy="6858000"/>
+          </a:xfrm>
+          <a:prstGeom prst="rect">
+            <a:avLst/>
+          </a:prstGeom>
+        </p:spPr>
+      </p:pic>
+      <p:sp>
+        <p:nvSpPr>
+          <p:cNvPr id="5" name="Rectangle 6">
+            <a:extLst>
+              <a:ext uri="{FF2B5EF4-FFF2-40B4-BE49-F238E27FC236}">
+                <a16:creationId xmlns:a16="http://schemas.microsoft.com/office/drawing/2014/main" id="{D0C0EC3F-B906-FD0E-3D0A-8323D103FC5C}"/>
+              </a:ext>
+            </a:extLst>
+          </p:cNvPr>
+          <p:cNvSpPr>
+            <a:spLocks noChangeArrowheads="1"/>
+          </p:cNvSpPr>
+          <p:nvPr/>
+        </p:nvSpPr>
+        <p:spPr bwMode="auto">
+          <a:xfrm>
+            <a:off x="485775" y="412750"/>
+            <a:ext cx="4411592" cy="846386"/>
+          </a:xfrm>
+          <a:prstGeom prst="rect">
+            <a:avLst/>
+          </a:prstGeom>
+          <a:noFill/>
+          <a:ln>
+            <a:noFill/>
+          </a:ln>
+          <a:extLst>
+            <a:ext uri="{909E8E84-426E-40DD-AFC4-6F175D3DCCD1}">
+              <a14:hiddenFill xmlns:a14="http://schemas.microsoft.com/office/drawing/2010/main">
+                <a:solidFill>
+                  <a:srgbClr val="FFFFFF"/>
+                </a:solidFill>
+              </a14:hiddenFill>
+            </a:ext>
+            <a:ext uri="{91240B29-F687-4F45-9708-019B960494DF}">
+              <a14:hiddenLine xmlns:a14="http://schemas.microsoft.com/office/drawing/2010/main" w="9525">
+                <a:solidFill>
+                  <a:srgbClr val="000000"/>
+                </a:solidFill>
+                <a:miter lim="800000"/>
+                <a:headEnd/>
+                <a:tailEnd/>
+              </a14:hiddenLine>
+            </a:ext>
+          </a:extLst>
+        </p:spPr>
+        <p:txBody>
+          <a:bodyPr vert="horz" wrap="none" lIns="0" tIns="0" rIns="0" bIns="0" numCol="1" anchor="t" anchorCtr="0" compatLnSpc="1">
+            <a:prstTxWarp prst="textNoShape">
+              <a:avLst/>
+            </a:prstTxWarp>
+            <a:spAutoFit/>
+          </a:bodyPr>
+          <a:lstStyle>
+            <a:lvl1pPr eaLnBrk="0" fontAlgn="base" hangingPunct="0">
+              <a:spcBef>
+                <a:spcPct val="0"/>
+              </a:spcBef>
+              <a:spcAft>
+                <a:spcPct val="0"/>
+              </a:spcAft>
+              <a:defRPr>
+                <a:solidFill>
+                  <a:schemeClr val="tx1"/>
+                </a:solidFill>
+                <a:latin typeface="Arial" panose="020B0604020202020204" pitchFamily="34" charset="0"/>
+              </a:defRPr>
+            </a:lvl1pPr>
+            <a:lvl2pPr eaLnBrk="0" fontAlgn="base" hangingPunct="0">
+              <a:spcBef>
+                <a:spcPct val="0"/>
+              </a:spcBef>
+              <a:spcAft>
+                <a:spcPct val="0"/>
+              </a:spcAft>
+              <a:defRPr>
+                <a:solidFill>
+                  <a:schemeClr val="tx1"/>
+                </a:solidFill>
+                <a:latin typeface="Arial" panose="020B0604020202020204" pitchFamily="34" charset="0"/>
+              </a:defRPr>
+            </a:lvl2pPr>
+            <a:lvl3pPr eaLnBrk="0" fontAlgn="base" hangingPunct="0">
+              <a:spcBef>
+                <a:spcPct val="0"/>
+              </a:spcBef>
+              <a:spcAft>
+                <a:spcPct val="0"/>
+              </a:spcAft>
+              <a:defRPr>
+                <a:solidFill>
+                  <a:schemeClr val="tx1"/>
+                </a:solidFill>
+                <a:latin typeface="Arial" panose="020B0604020202020204" pitchFamily="34" charset="0"/>
+              </a:defRPr>
+            </a:lvl3pPr>
+            <a:lvl4pPr eaLnBrk="0" fontAlgn="base" hangingPunct="0">
+              <a:spcBef>
+                <a:spcPct val="0"/>
+              </a:spcBef>
+              <a:spcAft>
+                <a:spcPct val="0"/>
+              </a:spcAft>
+              <a:defRPr>
+                <a:solidFill>
+                  <a:schemeClr val="tx1"/>
+                </a:solidFill>
+                <a:latin typeface="Arial" panose="020B0604020202020204" pitchFamily="34" charset="0"/>
+              </a:defRPr>
+            </a:lvl4pPr>
+            <a:lvl5pPr eaLnBrk="0" fontAlgn="base" hangingPunct="0">
+              <a:spcBef>
+                <a:spcPct val="0"/>
+              </a:spcBef>
+              <a:spcAft>
+                <a:spcPct val="0"/>
+              </a:spcAft>
+              <a:defRPr>
+                <a:solidFill>
+                  <a:schemeClr val="tx1"/>
+                </a:solidFill>
+                <a:latin typeface="Arial" panose="020B0604020202020204" pitchFamily="34" charset="0"/>
+              </a:defRPr>
+            </a:lvl5pPr>
+            <a:lvl6pPr eaLnBrk="0" fontAlgn="base" hangingPunct="0">
+              <a:spcBef>
+                <a:spcPct val="0"/>
+              </a:spcBef>
+              <a:spcAft>
+                <a:spcPct val="0"/>
+              </a:spcAft>
+              <a:defRPr>
+                <a:solidFill>
+                  <a:schemeClr val="tx1"/>
+                </a:solidFill>
+                <a:latin typeface="Arial" panose="020B0604020202020204" pitchFamily="34" charset="0"/>
+              </a:defRPr>
+            </a:lvl6pPr>
+            <a:lvl7pPr eaLnBrk="0" fontAlgn="base" hangingPunct="0">
+              <a:spcBef>
+                <a:spcPct val="0"/>
+              </a:spcBef>
+              <a:spcAft>
+                <a:spcPct val="0"/>
+              </a:spcAft>
+              <a:defRPr>
+                <a:solidFill>
+                  <a:schemeClr val="tx1"/>
+                </a:solidFill>
+                <a:latin typeface="Arial" panose="020B0604020202020204" pitchFamily="34" charset="0"/>
+              </a:defRPr>
+            </a:lvl7pPr>
+            <a:lvl8pPr eaLnBrk="0" fontAlgn="base" hangingPunct="0">
+              <a:spcBef>
+                <a:spcPct val="0"/>
+              </a:spcBef>
+              <a:spcAft>
+                <a:spcPct val="0"/>
+              </a:spcAft>
+              <a:defRPr>
+                <a:solidFill>
+                  <a:schemeClr val="tx1"/>
+                </a:solidFill>
+                <a:latin typeface="Arial" panose="020B0604020202020204" pitchFamily="34" charset="0"/>
+              </a:defRPr>
+            </a:lvl8pPr>
+            <a:lvl9pPr eaLnBrk="0" fontAlgn="base" hangingPunct="0">
+              <a:spcBef>
+                <a:spcPct val="0"/>
+              </a:spcBef>
+              <a:spcAft>
+                <a:spcPct val="0"/>
+              </a:spcAft>
+              <a:defRPr>
+                <a:solidFill>
+                  <a:schemeClr val="tx1"/>
+                </a:solidFill>
+                <a:latin typeface="Arial" panose="020B0604020202020204" pitchFamily="34" charset="0"/>
+              </a:defRPr>
+            </a:lvl9pPr>
+          </a:lstStyle>
+          <a:p>
+            <a:pPr marL="0" marR="0" lvl="0" indent="0" algn="l" defTabSz="914400" rtl="0" eaLnBrk="0" fontAlgn="base" latinLnBrk="0" hangingPunct="0">
+              <a:lnSpc>
+                <a:spcPct val="100000"/>
+              </a:lnSpc>
+              <a:spcBef>
+                <a:spcPct val="0"/>
+              </a:spcBef>
+              <a:spcAft>
+                <a:spcPct val="0"/>
+              </a:spcAft>
+              <a:buClrTx/>
+              <a:buSzTx/>
+              <a:buFontTx/>
+              <a:buNone/>
+              <a:tabLst/>
+            </a:pPr>
+            <a:r>
+              <a:rPr lang="ru-RU" altLang="ru-RU" sz="5500" b="1" dirty="0">
+                <a:solidFill>
+                  <a:srgbClr val="000000"/>
+                </a:solidFill>
+                <a:latin typeface="Times New Roman" panose="02020603050405020304" pitchFamily="18" charset="0"/>
+                <a:cs typeface="Times New Roman" panose="02020603050405020304" pitchFamily="18" charset="0"/>
+              </a:rPr>
+              <a:t>Комментарии</a:t>
+            </a:r>
+            <a:endParaRPr kumimoji="0" lang="ru-RU" altLang="ru-RU" sz="1800" b="0" i="0" u="none" strike="noStrike" cap="none" normalizeH="0" baseline="0" dirty="0">
+              <a:ln>
+                <a:noFill/>
+              </a:ln>
+              <a:solidFill>
+                <a:schemeClr val="tx1"/>
+              </a:solidFill>
+              <a:effectLst/>
+              <a:latin typeface="Times New Roman" panose="02020603050405020304" pitchFamily="18" charset="0"/>
+              <a:cs typeface="Times New Roman" panose="02020603050405020304" pitchFamily="18" charset="0"/>
+            </a:endParaRPr>
+          </a:p>
+        </p:txBody>
+      </p:sp>
+      <p:pic>
+        <p:nvPicPr>
+          <p:cNvPr id="3" name="Рисунок 2">
+            <a:extLst>
+              <a:ext uri="{FF2B5EF4-FFF2-40B4-BE49-F238E27FC236}">
+                <a16:creationId xmlns:a16="http://schemas.microsoft.com/office/drawing/2014/main" id="{CCAEEA78-0FE3-4E9C-D2A4-DA87A58D2DBC}"/>
+              </a:ext>
+            </a:extLst>
+          </p:cNvPr>
+          <p:cNvPicPr>
+            <a:picLocks noChangeAspect="1"/>
+          </p:cNvPicPr>
+          <p:nvPr/>
+        </p:nvPicPr>
+        <p:blipFill>
+          <a:blip r:embed="rId3"/>
+          <a:stretch>
+            <a:fillRect/>
+          </a:stretch>
+        </p:blipFill>
+        <p:spPr>
+          <a:xfrm>
+            <a:off x="2270252" y="1881485"/>
+            <a:ext cx="7651493" cy="4354165"/>
+          </a:xfrm>
+          <a:prstGeom prst="rect">
+            <a:avLst/>
+          </a:prstGeom>
+        </p:spPr>
+      </p:pic>
+    </p:spTree>
+    <p:extLst>
+      <p:ext uri="{BB962C8B-B14F-4D97-AF65-F5344CB8AC3E}">
+        <p14:creationId xmlns:p14="http://schemas.microsoft.com/office/powerpoint/2010/main" val="1852719548"/>
+      </p:ext>
+    </p:extLst>
+  </p:cSld>
+  <p:clrMapOvr>
+    <a:masterClrMapping/>
+  </p:clrMapOvr>
+</p:sld>
+</file>
+
+<file path=ppt/slides/slide4.xml><?xml version="1.0" encoding="utf-8"?>
+<p:sld xmlns:a="http://schemas.openxmlformats.org/drawingml/2006/main" xmlns:r="http://schemas.openxmlformats.org/officeDocument/2006/relationships" xmlns:p="http://schemas.openxmlformats.org/presentationml/2006/main">
+  <p:cSld>
+    <p:spTree>
+      <p:nvGrpSpPr>
+        <p:cNvPr id="1" name="">
+          <a:extLst>
+            <a:ext uri="{FF2B5EF4-FFF2-40B4-BE49-F238E27FC236}">
+              <a16:creationId xmlns:a16="http://schemas.microsoft.com/office/drawing/2014/main" id="{91EBEF6A-6509-C358-8BAB-CB0FA8390516}"/>
+            </a:ext>
+          </a:extLst>
+        </p:cNvPr>
+        <p:cNvGrpSpPr/>
+        <p:nvPr/>
+      </p:nvGrpSpPr>
+      <p:grpSpPr>
+        <a:xfrm>
+          <a:off x="0" y="0"/>
+          <a:ext cx="0" cy="0"/>
+          <a:chOff x="0" y="0"/>
+          <a:chExt cx="0" cy="0"/>
+        </a:xfrm>
+      </p:grpSpPr>
+      <p:pic>
+        <p:nvPicPr>
+          <p:cNvPr id="13" name="Рисунок 12">
+            <a:extLst>
+              <a:ext uri="{FF2B5EF4-FFF2-40B4-BE49-F238E27FC236}">
+                <a16:creationId xmlns:a16="http://schemas.microsoft.com/office/drawing/2014/main" id="{51D68D2F-AA1D-E526-E64C-2258C71A213C}"/>
+              </a:ext>
+            </a:extLst>
+          </p:cNvPr>
+          <p:cNvPicPr>
+            <a:picLocks noChangeAspect="1"/>
+          </p:cNvPicPr>
+          <p:nvPr/>
+        </p:nvPicPr>
+        <p:blipFill>
+          <a:blip r:embed="rId3">
+            <a:extLst>
+              <a:ext uri="{28A0092B-C50C-407E-A947-70E740481C1C}">
+                <a14:useLocalDpi xmlns:a14="http://schemas.microsoft.com/office/drawing/2010/main" val="0"/>
+              </a:ext>
+            </a:extLst>
+          </a:blip>
+          <a:stretch>
+            <a:fillRect/>
+          </a:stretch>
+        </p:blipFill>
+        <p:spPr>
+          <a:xfrm>
+            <a:off x="0" y="0"/>
+            <a:ext cx="12191999" cy="6858000"/>
+          </a:xfrm>
+          <a:prstGeom prst="rect">
+            <a:avLst/>
+          </a:prstGeom>
+        </p:spPr>
+      </p:pic>
+      <p:sp>
+        <p:nvSpPr>
+          <p:cNvPr id="2" name="Rectangle 5">
+            <a:extLst>
+              <a:ext uri="{FF2B5EF4-FFF2-40B4-BE49-F238E27FC236}">
+                <a16:creationId xmlns:a16="http://schemas.microsoft.com/office/drawing/2014/main" id="{5992CFF5-598F-AEA1-4E80-E52E8E4456F1}"/>
+              </a:ext>
+            </a:extLst>
+          </p:cNvPr>
+          <p:cNvSpPr>
+            <a:spLocks noChangeArrowheads="1"/>
+          </p:cNvSpPr>
+          <p:nvPr/>
+        </p:nvSpPr>
+        <p:spPr bwMode="auto">
+          <a:xfrm>
+            <a:off x="420688" y="396876"/>
+            <a:ext cx="4110100" cy="861774"/>
+          </a:xfrm>
+          <a:prstGeom prst="rect">
+            <a:avLst/>
+          </a:prstGeom>
+          <a:noFill/>
+          <a:ln>
+            <a:noFill/>
+          </a:ln>
+          <a:extLst>
+            <a:ext uri="{909E8E84-426E-40DD-AFC4-6F175D3DCCD1}">
+              <a14:hiddenFill xmlns:a14="http://schemas.microsoft.com/office/drawing/2010/main">
+                <a:solidFill>
+                  <a:srgbClr val="FFFFFF"/>
+                </a:solidFill>
+              </a14:hiddenFill>
+            </a:ext>
+            <a:ext uri="{91240B29-F687-4F45-9708-019B960494DF}">
+              <a14:hiddenLine xmlns:a14="http://schemas.microsoft.com/office/drawing/2010/main" w="9525">
+                <a:solidFill>
+                  <a:srgbClr val="000000"/>
+                </a:solidFill>
+                <a:miter lim="800000"/>
+                <a:headEnd/>
+                <a:tailEnd/>
+              </a14:hiddenLine>
+            </a:ext>
+          </a:extLst>
+        </p:spPr>
+        <p:txBody>
+          <a:bodyPr vert="horz" wrap="none" lIns="0" tIns="0" rIns="0" bIns="0" numCol="1" anchor="t" anchorCtr="0" compatLnSpc="1">
+            <a:prstTxWarp prst="textNoShape">
+              <a:avLst/>
+            </a:prstTxWarp>
+            <a:spAutoFit/>
+          </a:bodyPr>
+          <a:lstStyle>
+            <a:lvl1pPr eaLnBrk="0" fontAlgn="base" hangingPunct="0">
+              <a:spcBef>
+                <a:spcPct val="0"/>
+              </a:spcBef>
+              <a:spcAft>
+                <a:spcPct val="0"/>
+              </a:spcAft>
+              <a:defRPr>
+                <a:solidFill>
+                  <a:schemeClr val="tx1"/>
+                </a:solidFill>
+                <a:latin typeface="Arial" panose="020B0604020202020204" pitchFamily="34" charset="0"/>
+              </a:defRPr>
+            </a:lvl1pPr>
+            <a:lvl2pPr eaLnBrk="0" fontAlgn="base" hangingPunct="0">
+              <a:spcBef>
+                <a:spcPct val="0"/>
+              </a:spcBef>
+              <a:spcAft>
+                <a:spcPct val="0"/>
+              </a:spcAft>
+              <a:defRPr>
+                <a:solidFill>
+                  <a:schemeClr val="tx1"/>
+                </a:solidFill>
+                <a:latin typeface="Arial" panose="020B0604020202020204" pitchFamily="34" charset="0"/>
+              </a:defRPr>
+            </a:lvl2pPr>
+            <a:lvl3pPr eaLnBrk="0" fontAlgn="base" hangingPunct="0">
+              <a:spcBef>
+                <a:spcPct val="0"/>
+              </a:spcBef>
+              <a:spcAft>
+                <a:spcPct val="0"/>
+              </a:spcAft>
+              <a:defRPr>
+                <a:solidFill>
+                  <a:schemeClr val="tx1"/>
+                </a:solidFill>
+                <a:latin typeface="Arial" panose="020B0604020202020204" pitchFamily="34" charset="0"/>
+              </a:defRPr>
+            </a:lvl3pPr>
+            <a:lvl4pPr eaLnBrk="0" fontAlgn="base" hangingPunct="0">
+              <a:spcBef>
+                <a:spcPct val="0"/>
+              </a:spcBef>
+              <a:spcAft>
+                <a:spcPct val="0"/>
+              </a:spcAft>
+              <a:defRPr>
+                <a:solidFill>
+                  <a:schemeClr val="tx1"/>
+                </a:solidFill>
+                <a:latin typeface="Arial" panose="020B0604020202020204" pitchFamily="34" charset="0"/>
+              </a:defRPr>
+            </a:lvl4pPr>
+            <a:lvl5pPr eaLnBrk="0" fontAlgn="base" hangingPunct="0">
+              <a:spcBef>
+                <a:spcPct val="0"/>
+              </a:spcBef>
+              <a:spcAft>
+                <a:spcPct val="0"/>
+              </a:spcAft>
+              <a:defRPr>
+                <a:solidFill>
+                  <a:schemeClr val="tx1"/>
+                </a:solidFill>
+                <a:latin typeface="Arial" panose="020B0604020202020204" pitchFamily="34" charset="0"/>
+              </a:defRPr>
+            </a:lvl5pPr>
+            <a:lvl6pPr eaLnBrk="0" fontAlgn="base" hangingPunct="0">
+              <a:spcBef>
+                <a:spcPct val="0"/>
+              </a:spcBef>
+              <a:spcAft>
+                <a:spcPct val="0"/>
+              </a:spcAft>
+              <a:defRPr>
+                <a:solidFill>
+                  <a:schemeClr val="tx1"/>
+                </a:solidFill>
+                <a:latin typeface="Arial" panose="020B0604020202020204" pitchFamily="34" charset="0"/>
+              </a:defRPr>
+            </a:lvl6pPr>
+            <a:lvl7pPr eaLnBrk="0" fontAlgn="base" hangingPunct="0">
+              <a:spcBef>
+                <a:spcPct val="0"/>
+              </a:spcBef>
+              <a:spcAft>
+                <a:spcPct val="0"/>
+              </a:spcAft>
+              <a:defRPr>
+                <a:solidFill>
+                  <a:schemeClr val="tx1"/>
+                </a:solidFill>
+                <a:latin typeface="Arial" panose="020B0604020202020204" pitchFamily="34" charset="0"/>
+              </a:defRPr>
+            </a:lvl7pPr>
+            <a:lvl8pPr eaLnBrk="0" fontAlgn="base" hangingPunct="0">
+              <a:spcBef>
+                <a:spcPct val="0"/>
+              </a:spcBef>
+              <a:spcAft>
+                <a:spcPct val="0"/>
+              </a:spcAft>
+              <a:defRPr>
+                <a:solidFill>
+                  <a:schemeClr val="tx1"/>
+                </a:solidFill>
+                <a:latin typeface="Arial" panose="020B0604020202020204" pitchFamily="34" charset="0"/>
+              </a:defRPr>
+            </a:lvl8pPr>
+            <a:lvl9pPr eaLnBrk="0" fontAlgn="base" hangingPunct="0">
+              <a:spcBef>
+                <a:spcPct val="0"/>
+              </a:spcBef>
+              <a:spcAft>
+                <a:spcPct val="0"/>
+              </a:spcAft>
+              <a:defRPr>
+                <a:solidFill>
+                  <a:schemeClr val="tx1"/>
+                </a:solidFill>
+                <a:latin typeface="Arial" panose="020B0604020202020204" pitchFamily="34" charset="0"/>
+              </a:defRPr>
+            </a:lvl9pPr>
+          </a:lstStyle>
+          <a:p>
+            <a:pPr lvl="0"/>
+            <a:r>
+              <a:rPr lang="ru-RU" altLang="ru-RU" sz="5600" b="1" dirty="0">
+                <a:solidFill>
+                  <a:srgbClr val="000000"/>
+                </a:solidFill>
+                <a:latin typeface="Times New Roman" panose="02020603050405020304" pitchFamily="18" charset="0"/>
+                <a:cs typeface="Times New Roman" panose="02020603050405020304" pitchFamily="18" charset="0"/>
+              </a:rPr>
+              <a:t>Переменные</a:t>
+            </a:r>
+            <a:endParaRPr kumimoji="0" lang="ru-RU" altLang="ru-RU" sz="1800" b="0" i="0" u="none" strike="noStrike" cap="none" normalizeH="0" baseline="0" dirty="0">
+              <a:ln>
+                <a:noFill/>
+              </a:ln>
+              <a:solidFill>
+                <a:schemeClr val="tx1"/>
+              </a:solidFill>
+              <a:effectLst/>
+              <a:latin typeface="Times New Roman" panose="02020603050405020304" pitchFamily="18" charset="0"/>
+              <a:cs typeface="Times New Roman" panose="02020603050405020304" pitchFamily="18" charset="0"/>
+            </a:endParaRPr>
+          </a:p>
+        </p:txBody>
+      </p:sp>
+      <p:pic>
+        <p:nvPicPr>
+          <p:cNvPr id="3" name="Рисунок 2" descr="https://sun9-69.vkuserphoto.ru/s/v1/ig2/lXYtYHEza_dg-c-deHdyVON3Fiv1uSQg7RqWiXx7ddhpzDGqOLyTzTDso7r845DzagQT_LWpCCJ-ZgZOUIFSzeeU.jpg?quality=95&amp;as=32x27,48x41,72x62,108x93,160x138,240x206,360x309,399x343&amp;from=bu&amp;u=6kFFHVlWm9bWIkMJF7J-TwVjQrzA2FZTekjwE9M8sYQ&amp;cs=399x0">
+            <a:extLst>
+              <a:ext uri="{FF2B5EF4-FFF2-40B4-BE49-F238E27FC236}">
+                <a16:creationId xmlns:a16="http://schemas.microsoft.com/office/drawing/2014/main" id="{20AA21A4-56C3-A9EF-21E3-A0C96C33145C}"/>
+              </a:ext>
+            </a:extLst>
+          </p:cNvPr>
+          <p:cNvPicPr>
+            <a:picLocks noChangeAspect="1"/>
+          </p:cNvPicPr>
+          <p:nvPr/>
+        </p:nvPicPr>
+        <p:blipFill>
+          <a:blip r:embed="rId4"/>
+          <a:stretch>
+            <a:fillRect/>
+          </a:stretch>
+        </p:blipFill>
+        <p:spPr>
+          <a:xfrm>
+            <a:off x="3457850" y="1790443"/>
+            <a:ext cx="5276297" cy="4535764"/>
+          </a:xfrm>
+          <a:prstGeom prst="rect">
+            <a:avLst/>
+          </a:prstGeom>
+          <a:solidFill>
+            <a:srgbClr val="FFFFFF">
+              <a:shade val="85000"/>
+            </a:srgbClr>
+          </a:solidFill>
+          <a:ln w="88900" cap="sq">
+            <a:solidFill>
+              <a:srgbClr val="FFFFFF"/>
+            </a:solidFill>
+            <a:miter lim="800000"/>
+          </a:ln>
+          <a:effectLst>
+            <a:outerShdw blurRad="55000" dist="18000" dir="5400000" algn="tl" rotWithShape="0">
+              <a:srgbClr val="000000">
+                <a:alpha val="40000"/>
+              </a:srgbClr>
+            </a:outerShdw>
+          </a:effectLst>
+          <a:scene3d>
+            <a:camera prst="orthographicFront"/>
+            <a:lightRig rig="twoPt" dir="t">
+              <a:rot lat="0" lon="0" rev="7200000"/>
+            </a:lightRig>
+          </a:scene3d>
+          <a:sp3d>
+            <a:bevelT w="25400" h="19050"/>
+            <a:contourClr>
+              <a:srgbClr val="FFFFFF"/>
+            </a:contourClr>
+          </a:sp3d>
+        </p:spPr>
+      </p:pic>
+    </p:spTree>
+    <p:extLst>
+      <p:ext uri="{BB962C8B-B14F-4D97-AF65-F5344CB8AC3E}">
+        <p14:creationId xmlns:p14="http://schemas.microsoft.com/office/powerpoint/2010/main" val="454924967"/>
+      </p:ext>
+    </p:extLst>
+  </p:cSld>
+  <p:clrMapOvr>
+    <a:masterClrMapping/>
+  </p:clrMapOvr>
+</p:sld>
+</file>
+
+<file path=ppt/slides/slide5.xml><?xml version="1.0" encoding="utf-8"?>
+<p:sld xmlns:a="http://schemas.openxmlformats.org/drawingml/2006/main" xmlns:r="http://schemas.openxmlformats.org/officeDocument/2006/relationships" xmlns:p="http://schemas.openxmlformats.org/presentationml/2006/main">
+  <p:cSld>
+    <p:spTree>
+      <p:nvGrpSpPr>
+        <p:cNvPr id="1" name="">
+          <a:extLst>
+            <a:ext uri="{FF2B5EF4-FFF2-40B4-BE49-F238E27FC236}">
+              <a16:creationId xmlns:a16="http://schemas.microsoft.com/office/drawing/2014/main" id="{FD3D61C4-9B07-1B13-46E5-CB73D1A363E2}"/>
+            </a:ext>
+          </a:extLst>
+        </p:cNvPr>
+        <p:cNvGrpSpPr/>
+        <p:nvPr/>
+      </p:nvGrpSpPr>
+      <p:grpSpPr>
+        <a:xfrm>
+          <a:off x="0" y="0"/>
+          <a:ext cx="0" cy="0"/>
+          <a:chOff x="0" y="0"/>
+          <a:chExt cx="0" cy="0"/>
+        </a:xfrm>
+      </p:grpSpPr>
+      <p:pic>
+        <p:nvPicPr>
+          <p:cNvPr id="13" name="Рисунок 12">
+            <a:extLst>
+              <a:ext uri="{FF2B5EF4-FFF2-40B4-BE49-F238E27FC236}">
+                <a16:creationId xmlns:a16="http://schemas.microsoft.com/office/drawing/2014/main" id="{02A33582-884A-7620-9F65-963C5341A091}"/>
+              </a:ext>
+            </a:extLst>
+          </p:cNvPr>
+          <p:cNvPicPr>
+            <a:picLocks noChangeAspect="1"/>
+          </p:cNvPicPr>
+          <p:nvPr/>
+        </p:nvPicPr>
+        <p:blipFill>
+          <a:blip r:embed="rId3">
+            <a:extLst>
+              <a:ext uri="{28A0092B-C50C-407E-A947-70E740481C1C}">
+                <a14:useLocalDpi xmlns:a14="http://schemas.microsoft.com/office/drawing/2010/main" val="0"/>
+              </a:ext>
+            </a:extLst>
+          </a:blip>
+          <a:stretch>
+            <a:fillRect/>
+          </a:stretch>
+        </p:blipFill>
+        <p:spPr>
+          <a:xfrm>
+            <a:off x="0" y="0"/>
+            <a:ext cx="12191999" cy="6858000"/>
+          </a:xfrm>
+          <a:prstGeom prst="rect">
+            <a:avLst/>
+          </a:prstGeom>
+        </p:spPr>
+      </p:pic>
+      <p:sp>
+        <p:nvSpPr>
+          <p:cNvPr id="2" name="Rectangle 5">
+            <a:extLst>
+              <a:ext uri="{FF2B5EF4-FFF2-40B4-BE49-F238E27FC236}">
+                <a16:creationId xmlns:a16="http://schemas.microsoft.com/office/drawing/2014/main" id="{4F2EEBF7-48C3-E02F-C576-8F5AE63BDD59}"/>
+              </a:ext>
+            </a:extLst>
+          </p:cNvPr>
+          <p:cNvSpPr>
+            <a:spLocks noChangeArrowheads="1"/>
+          </p:cNvSpPr>
+          <p:nvPr/>
+        </p:nvSpPr>
+        <p:spPr bwMode="auto">
+          <a:xfrm>
+            <a:off x="420688" y="396876"/>
+            <a:ext cx="4110100" cy="861774"/>
+          </a:xfrm>
+          <a:prstGeom prst="rect">
+            <a:avLst/>
+          </a:prstGeom>
+          <a:noFill/>
+          <a:ln>
+            <a:noFill/>
+          </a:ln>
+          <a:extLst>
+            <a:ext uri="{909E8E84-426E-40DD-AFC4-6F175D3DCCD1}">
+              <a14:hiddenFill xmlns:a14="http://schemas.microsoft.com/office/drawing/2010/main">
+                <a:solidFill>
+                  <a:srgbClr val="FFFFFF"/>
+                </a:solidFill>
+              </a14:hiddenFill>
+            </a:ext>
+            <a:ext uri="{91240B29-F687-4F45-9708-019B960494DF}">
+              <a14:hiddenLine xmlns:a14="http://schemas.microsoft.com/office/drawing/2010/main" w="9525">
+                <a:solidFill>
+                  <a:srgbClr val="000000"/>
+                </a:solidFill>
+                <a:miter lim="800000"/>
+                <a:headEnd/>
+                <a:tailEnd/>
+              </a14:hiddenLine>
+            </a:ext>
+          </a:extLst>
+        </p:spPr>
+        <p:txBody>
+          <a:bodyPr vert="horz" wrap="none" lIns="0" tIns="0" rIns="0" bIns="0" numCol="1" anchor="t" anchorCtr="0" compatLnSpc="1">
+            <a:prstTxWarp prst="textNoShape">
+              <a:avLst/>
+            </a:prstTxWarp>
+            <a:spAutoFit/>
+          </a:bodyPr>
+          <a:lstStyle>
+            <a:lvl1pPr eaLnBrk="0" fontAlgn="base" hangingPunct="0">
+              <a:spcBef>
+                <a:spcPct val="0"/>
+              </a:spcBef>
+              <a:spcAft>
+                <a:spcPct val="0"/>
+              </a:spcAft>
+              <a:defRPr>
+                <a:solidFill>
+                  <a:schemeClr val="tx1"/>
+                </a:solidFill>
+                <a:latin typeface="Arial" panose="020B0604020202020204" pitchFamily="34" charset="0"/>
+              </a:defRPr>
+            </a:lvl1pPr>
+            <a:lvl2pPr eaLnBrk="0" fontAlgn="base" hangingPunct="0">
+              <a:spcBef>
+                <a:spcPct val="0"/>
+              </a:spcBef>
+              <a:spcAft>
+                <a:spcPct val="0"/>
+              </a:spcAft>
+              <a:defRPr>
+                <a:solidFill>
+                  <a:schemeClr val="tx1"/>
+                </a:solidFill>
+                <a:latin typeface="Arial" panose="020B0604020202020204" pitchFamily="34" charset="0"/>
+              </a:defRPr>
+            </a:lvl2pPr>
+            <a:lvl3pPr eaLnBrk="0" fontAlgn="base" hangingPunct="0">
+              <a:spcBef>
+                <a:spcPct val="0"/>
+              </a:spcBef>
+              <a:spcAft>
+                <a:spcPct val="0"/>
+              </a:spcAft>
+              <a:defRPr>
+                <a:solidFill>
+                  <a:schemeClr val="tx1"/>
+                </a:solidFill>
+                <a:latin typeface="Arial" panose="020B0604020202020204" pitchFamily="34" charset="0"/>
+              </a:defRPr>
+            </a:lvl3pPr>
+            <a:lvl4pPr eaLnBrk="0" fontAlgn="base" hangingPunct="0">
+              <a:spcBef>
+                <a:spcPct val="0"/>
+              </a:spcBef>
+              <a:spcAft>
+                <a:spcPct val="0"/>
+              </a:spcAft>
+              <a:defRPr>
+                <a:solidFill>
+                  <a:schemeClr val="tx1"/>
+                </a:solidFill>
+                <a:latin typeface="Arial" panose="020B0604020202020204" pitchFamily="34" charset="0"/>
+              </a:defRPr>
+            </a:lvl4pPr>
+            <a:lvl5pPr eaLnBrk="0" fontAlgn="base" hangingPunct="0">
+              <a:spcBef>
+                <a:spcPct val="0"/>
+              </a:spcBef>
+              <a:spcAft>
+                <a:spcPct val="0"/>
+              </a:spcAft>
+              <a:defRPr>
+                <a:solidFill>
+                  <a:schemeClr val="tx1"/>
+                </a:solidFill>
+                <a:latin typeface="Arial" panose="020B0604020202020204" pitchFamily="34" charset="0"/>
+              </a:defRPr>
+            </a:lvl5pPr>
+            <a:lvl6pPr eaLnBrk="0" fontAlgn="base" hangingPunct="0">
+              <a:spcBef>
+                <a:spcPct val="0"/>
+              </a:spcBef>
+              <a:spcAft>
+                <a:spcPct val="0"/>
+              </a:spcAft>
+              <a:defRPr>
+                <a:solidFill>
+                  <a:schemeClr val="tx1"/>
+                </a:solidFill>
+                <a:latin typeface="Arial" panose="020B0604020202020204" pitchFamily="34" charset="0"/>
+              </a:defRPr>
+            </a:lvl6pPr>
+            <a:lvl7pPr eaLnBrk="0" fontAlgn="base" hangingPunct="0">
+              <a:spcBef>
+                <a:spcPct val="0"/>
+              </a:spcBef>
+              <a:spcAft>
+                <a:spcPct val="0"/>
+              </a:spcAft>
+              <a:defRPr>
+                <a:solidFill>
+                  <a:schemeClr val="tx1"/>
+                </a:solidFill>
+                <a:latin typeface="Arial" panose="020B0604020202020204" pitchFamily="34" charset="0"/>
+              </a:defRPr>
+            </a:lvl7pPr>
+            <a:lvl8pPr eaLnBrk="0" fontAlgn="base" hangingPunct="0">
+              <a:spcBef>
+                <a:spcPct val="0"/>
+              </a:spcBef>
+              <a:spcAft>
+                <a:spcPct val="0"/>
+              </a:spcAft>
+              <a:defRPr>
+                <a:solidFill>
+                  <a:schemeClr val="tx1"/>
+                </a:solidFill>
+                <a:latin typeface="Arial" panose="020B0604020202020204" pitchFamily="34" charset="0"/>
+              </a:defRPr>
+            </a:lvl8pPr>
+            <a:lvl9pPr eaLnBrk="0" fontAlgn="base" hangingPunct="0">
+              <a:spcBef>
+                <a:spcPct val="0"/>
+              </a:spcBef>
+              <a:spcAft>
+                <a:spcPct val="0"/>
+              </a:spcAft>
+              <a:defRPr>
+                <a:solidFill>
+                  <a:schemeClr val="tx1"/>
+                </a:solidFill>
+                <a:latin typeface="Arial" panose="020B0604020202020204" pitchFamily="34" charset="0"/>
+              </a:defRPr>
+            </a:lvl9pPr>
+          </a:lstStyle>
+          <a:p>
+            <a:pPr lvl="0"/>
+            <a:r>
+              <a:rPr lang="ru-RU" altLang="ru-RU" sz="5600" b="1" dirty="0">
+                <a:solidFill>
+                  <a:srgbClr val="000000"/>
+                </a:solidFill>
+                <a:latin typeface="Times New Roman" panose="02020603050405020304" pitchFamily="18" charset="0"/>
+                <a:cs typeface="Times New Roman" panose="02020603050405020304" pitchFamily="18" charset="0"/>
+              </a:rPr>
+              <a:t>Переменные</a:t>
+            </a:r>
+            <a:endParaRPr kumimoji="0" lang="ru-RU" altLang="ru-RU" sz="1800" b="0" i="0" u="none" strike="noStrike" cap="none" normalizeH="0" baseline="0" dirty="0">
+              <a:ln>
+                <a:noFill/>
+              </a:ln>
+              <a:solidFill>
+                <a:schemeClr val="tx1"/>
+              </a:solidFill>
+              <a:effectLst/>
+              <a:latin typeface="Times New Roman" panose="02020603050405020304" pitchFamily="18" charset="0"/>
+              <a:cs typeface="Times New Roman" panose="02020603050405020304" pitchFamily="18" charset="0"/>
+            </a:endParaRPr>
+          </a:p>
+        </p:txBody>
+      </p:sp>
+      <p:pic>
+        <p:nvPicPr>
+          <p:cNvPr id="4" name="Рисунок 3" descr="https://sun9-9.vkuserphoto.ru/s/v1/ig2/J1KLMRr2CTIf3f9GCqH4JsXRhRNrnoKHkuxCCcbZP6CPIOZOA-KVRt0LUsBaI-Rk0VJPxQH86XmO5KsUCkSbu1wp.jpg?quality=95&amp;as=32x20,48x29,72x44,108x66,160x98,240x147,360x220,399x244&amp;from=bu&amp;cs=399x0">
+            <a:extLst>
+              <a:ext uri="{FF2B5EF4-FFF2-40B4-BE49-F238E27FC236}">
+                <a16:creationId xmlns:a16="http://schemas.microsoft.com/office/drawing/2014/main" id="{B98F8D2C-8CED-A577-5D4E-E858B6D6774A}"/>
+              </a:ext>
+            </a:extLst>
+          </p:cNvPr>
+          <p:cNvPicPr>
+            <a:picLocks noChangeAspect="1"/>
+          </p:cNvPicPr>
+          <p:nvPr/>
+        </p:nvPicPr>
+        <p:blipFill>
+          <a:blip r:embed="rId4"/>
+          <a:stretch>
+            <a:fillRect/>
+          </a:stretch>
+        </p:blipFill>
+        <p:spPr>
+          <a:xfrm>
+            <a:off x="2638065" y="1972764"/>
+            <a:ext cx="6915869" cy="4229253"/>
+          </a:xfrm>
+          <a:prstGeom prst="rect">
+            <a:avLst/>
+          </a:prstGeom>
+          <a:solidFill>
+            <a:srgbClr val="FFFFFF">
+              <a:shade val="85000"/>
+            </a:srgbClr>
+          </a:solidFill>
+          <a:ln w="88900" cap="sq">
+            <a:solidFill>
+              <a:srgbClr val="FFFFFF"/>
+            </a:solidFill>
+            <a:miter lim="800000"/>
+          </a:ln>
+          <a:effectLst>
+            <a:outerShdw blurRad="55000" dist="18000" dir="5400000" algn="tl" rotWithShape="0">
+              <a:srgbClr val="000000">
+                <a:alpha val="40000"/>
+              </a:srgbClr>
+            </a:outerShdw>
+          </a:effectLst>
+          <a:scene3d>
+            <a:camera prst="orthographicFront"/>
+            <a:lightRig rig="twoPt" dir="t">
+              <a:rot lat="0" lon="0" rev="7200000"/>
+            </a:lightRig>
+          </a:scene3d>
+          <a:sp3d>
+            <a:bevelT w="25400" h="19050"/>
+            <a:contourClr>
+              <a:srgbClr val="FFFFFF"/>
+            </a:contourClr>
+          </a:sp3d>
+        </p:spPr>
+      </p:pic>
+    </p:spTree>
+    <p:extLst>
+      <p:ext uri="{BB962C8B-B14F-4D97-AF65-F5344CB8AC3E}">
+        <p14:creationId xmlns:p14="http://schemas.microsoft.com/office/powerpoint/2010/main" val="2526449073"/>
+      </p:ext>
+    </p:extLst>
+  </p:cSld>
+  <p:clrMapOvr>
+    <a:masterClrMapping/>
+  </p:clrMapOvr>
+</p:sld>
+</file>
+
+<file path=ppt/slides/slide6.xml><?xml version="1.0" encoding="utf-8"?>
+<p:sld xmlns:a="http://schemas.openxmlformats.org/drawingml/2006/main" xmlns:r="http://schemas.openxmlformats.org/officeDocument/2006/relationships" xmlns:p="http://schemas.openxmlformats.org/presentationml/2006/main">
+  <p:cSld>
+    <p:spTree>
+      <p:nvGrpSpPr>
+        <p:cNvPr id="1" name="">
+          <a:extLst>
+            <a:ext uri="{FF2B5EF4-FFF2-40B4-BE49-F238E27FC236}">
+              <a16:creationId xmlns:a16="http://schemas.microsoft.com/office/drawing/2014/main" id="{8CA83642-55C8-8A98-6113-27B22371B72D}"/>
+            </a:ext>
+          </a:extLst>
+        </p:cNvPr>
+        <p:cNvGrpSpPr/>
+        <p:nvPr/>
+      </p:nvGrpSpPr>
+      <p:grpSpPr>
+        <a:xfrm>
+          <a:off x="0" y="0"/>
+          <a:ext cx="0" cy="0"/>
+          <a:chOff x="0" y="0"/>
+          <a:chExt cx="0" cy="0"/>
+        </a:xfrm>
+      </p:grpSpPr>
+      <p:pic>
+        <p:nvPicPr>
+          <p:cNvPr id="13" name="Рисунок 12">
+            <a:extLst>
+              <a:ext uri="{FF2B5EF4-FFF2-40B4-BE49-F238E27FC236}">
+                <a16:creationId xmlns:a16="http://schemas.microsoft.com/office/drawing/2014/main" id="{803D2CAF-892C-E1A7-0E41-B0DA51B45D60}"/>
+              </a:ext>
+            </a:extLst>
+          </p:cNvPr>
+          <p:cNvPicPr>
+            <a:picLocks noChangeAspect="1"/>
+          </p:cNvPicPr>
+          <p:nvPr/>
+        </p:nvPicPr>
+        <p:blipFill>
+          <a:blip r:embed="rId3">
+            <a:extLst>
+              <a:ext uri="{28A0092B-C50C-407E-A947-70E740481C1C}">
+                <a14:useLocalDpi xmlns:a14="http://schemas.microsoft.com/office/drawing/2010/main" val="0"/>
+              </a:ext>
+            </a:extLst>
+          </a:blip>
+          <a:stretch>
+            <a:fillRect/>
+          </a:stretch>
+        </p:blipFill>
+        <p:spPr>
+          <a:xfrm>
+            <a:off x="0" y="0"/>
+            <a:ext cx="12191999" cy="6858000"/>
+          </a:xfrm>
+          <a:prstGeom prst="rect">
+            <a:avLst/>
+          </a:prstGeom>
+        </p:spPr>
+      </p:pic>
+      <p:pic>
+        <p:nvPicPr>
+          <p:cNvPr id="16" name="Рисунок 15">
+            <a:extLst>
+              <a:ext uri="{FF2B5EF4-FFF2-40B4-BE49-F238E27FC236}">
+                <a16:creationId xmlns:a16="http://schemas.microsoft.com/office/drawing/2014/main" id="{92B03EEF-3415-82C1-8108-3469FC2935A0}"/>
+              </a:ext>
+            </a:extLst>
+          </p:cNvPr>
+          <p:cNvPicPr>
+            <a:picLocks noChangeAspect="1"/>
+          </p:cNvPicPr>
+          <p:nvPr/>
+        </p:nvPicPr>
+        <p:blipFill>
+          <a:blip r:embed="rId4"/>
+          <a:stretch>
+            <a:fillRect/>
+          </a:stretch>
+        </p:blipFill>
+        <p:spPr>
+          <a:xfrm>
+            <a:off x="1184695" y="0"/>
+            <a:ext cx="9822607" cy="6858000"/>
+          </a:xfrm>
+          <a:prstGeom prst="rect">
+            <a:avLst/>
+          </a:prstGeom>
+          <a:solidFill>
+            <a:srgbClr val="FFFFFF">
+              <a:shade val="85000"/>
+            </a:srgbClr>
+          </a:solidFill>
+          <a:ln w="88900" cap="sq">
+            <a:solidFill>
+              <a:srgbClr val="FFFFFF"/>
+            </a:solidFill>
+            <a:miter lim="800000"/>
+          </a:ln>
+          <a:effectLst>
+            <a:outerShdw blurRad="55000" dist="18000" dir="5400000" algn="tl" rotWithShape="0">
+              <a:srgbClr val="000000">
+                <a:alpha val="40000"/>
+              </a:srgbClr>
+            </a:outerShdw>
+          </a:effectLst>
+          <a:scene3d>
+            <a:camera prst="orthographicFront"/>
+            <a:lightRig rig="twoPt" dir="t">
+              <a:rot lat="0" lon="0" rev="7200000"/>
+            </a:lightRig>
+          </a:scene3d>
+          <a:sp3d>
+            <a:bevelT w="25400" h="19050"/>
+            <a:contourClr>
+              <a:srgbClr val="FFFFFF"/>
+            </a:contourClr>
+          </a:sp3d>
+        </p:spPr>
+      </p:pic>
+    </p:spTree>
+    <p:extLst>
+      <p:ext uri="{BB962C8B-B14F-4D97-AF65-F5344CB8AC3E}">
+        <p14:creationId xmlns:p14="http://schemas.microsoft.com/office/powerpoint/2010/main" val="1743350689"/>
+      </p:ext>
+    </p:extLst>
+  </p:cSld>
+  <p:clrMapOvr>
+    <a:masterClrMapping/>
+  </p:clrMapOvr>
+</p:sld>
+</file>
+
+<file path=ppt/slides/slide7.xml><?xml version="1.0" encoding="utf-8"?>
+<p:sld xmlns:a="http://schemas.openxmlformats.org/drawingml/2006/main" xmlns:r="http://schemas.openxmlformats.org/officeDocument/2006/relationships" xmlns:p="http://schemas.openxmlformats.org/presentationml/2006/main">
+  <p:cSld>
+    <p:spTree>
+      <p:nvGrpSpPr>
+        <p:cNvPr id="1" name="">
+          <a:extLst>
+            <a:ext uri="{FF2B5EF4-FFF2-40B4-BE49-F238E27FC236}">
+              <a16:creationId xmlns:a16="http://schemas.microsoft.com/office/drawing/2014/main" id="{C887C0BC-6AC0-4E00-1B5E-0B8C2772EA77}"/>
+            </a:ext>
+          </a:extLst>
+        </p:cNvPr>
+        <p:cNvGrpSpPr/>
+        <p:nvPr/>
+      </p:nvGrpSpPr>
+      <p:grpSpPr>
+        <a:xfrm>
+          <a:off x="0" y="0"/>
+          <a:ext cx="0" cy="0"/>
+          <a:chOff x="0" y="0"/>
+          <a:chExt cx="0" cy="0"/>
+        </a:xfrm>
+      </p:grpSpPr>
+      <p:pic>
+        <p:nvPicPr>
+          <p:cNvPr id="13" name="Рисунок 12">
+            <a:extLst>
+              <a:ext uri="{FF2B5EF4-FFF2-40B4-BE49-F238E27FC236}">
+                <a16:creationId xmlns:a16="http://schemas.microsoft.com/office/drawing/2014/main" id="{F0FAFCFC-129C-74F1-DDBC-9E642BC383A1}"/>
+              </a:ext>
+            </a:extLst>
+          </p:cNvPr>
+          <p:cNvPicPr>
+            <a:picLocks noChangeAspect="1"/>
+          </p:cNvPicPr>
+          <p:nvPr/>
+        </p:nvPicPr>
+        <p:blipFill>
+          <a:blip r:embed="rId3">
+            <a:extLst>
+              <a:ext uri="{28A0092B-C50C-407E-A947-70E740481C1C}">
+                <a14:useLocalDpi xmlns:a14="http://schemas.microsoft.com/office/drawing/2010/main" val="0"/>
+              </a:ext>
+            </a:extLst>
+          </a:blip>
+          <a:stretch>
+            <a:fillRect/>
+          </a:stretch>
+        </p:blipFill>
+        <p:spPr>
+          <a:xfrm>
+            <a:off x="0" y="0"/>
+            <a:ext cx="12191999" cy="6858000"/>
+          </a:xfrm>
+          <a:prstGeom prst="rect">
+            <a:avLst/>
+          </a:prstGeom>
+        </p:spPr>
+      </p:pic>
+      <p:pic>
+        <p:nvPicPr>
+          <p:cNvPr id="3" name="Рисунок 2">
+            <a:extLst>
+              <a:ext uri="{FF2B5EF4-FFF2-40B4-BE49-F238E27FC236}">
+                <a16:creationId xmlns:a16="http://schemas.microsoft.com/office/drawing/2014/main" id="{9DB7A761-DE43-D41E-8831-74A4C242BE2A}"/>
+              </a:ext>
+            </a:extLst>
+          </p:cNvPr>
+          <p:cNvPicPr>
+            <a:picLocks noChangeAspect="1"/>
+          </p:cNvPicPr>
+          <p:nvPr/>
+        </p:nvPicPr>
+        <p:blipFill>
+          <a:blip r:embed="rId4"/>
+          <a:stretch>
+            <a:fillRect/>
+          </a:stretch>
+        </p:blipFill>
+        <p:spPr>
+          <a:xfrm>
+            <a:off x="637016" y="691023"/>
+            <a:ext cx="10917968" cy="5475954"/>
+          </a:xfrm>
+          <a:prstGeom prst="rect">
+            <a:avLst/>
+          </a:prstGeom>
+          <a:solidFill>
+            <a:srgbClr val="FFFFFF">
+              <a:shade val="85000"/>
+            </a:srgbClr>
+          </a:solidFill>
+          <a:ln w="88900" cap="sq">
+            <a:solidFill>
+              <a:srgbClr val="FFFFFF"/>
+            </a:solidFill>
+            <a:miter lim="800000"/>
+          </a:ln>
+          <a:effectLst>
+            <a:outerShdw blurRad="55000" dist="18000" dir="5400000" algn="tl" rotWithShape="0">
+              <a:srgbClr val="000000">
+                <a:alpha val="40000"/>
+              </a:srgbClr>
+            </a:outerShdw>
+          </a:effectLst>
+          <a:scene3d>
+            <a:camera prst="orthographicFront"/>
+            <a:lightRig rig="twoPt" dir="t">
+              <a:rot lat="0" lon="0" rev="7200000"/>
+            </a:lightRig>
+          </a:scene3d>
+          <a:sp3d>
+            <a:bevelT w="25400" h="19050"/>
+            <a:contourClr>
+              <a:srgbClr val="FFFFFF"/>
+            </a:contourClr>
+          </a:sp3d>
+        </p:spPr>
+      </p:pic>
+    </p:spTree>
+    <p:extLst>
+      <p:ext uri="{BB962C8B-B14F-4D97-AF65-F5344CB8AC3E}">
+        <p14:creationId xmlns:p14="http://schemas.microsoft.com/office/powerpoint/2010/main" val="1534548989"/>
+      </p:ext>
+    </p:extLst>
+  </p:cSld>
+  <p:clrMapOvr>
+    <a:masterClrMapping/>
+  </p:clrMapOvr>
+</p:sld>
+</file>
+
+<file path=ppt/slides/slide8.xml><?xml version="1.0" encoding="utf-8"?>
+<p:sld xmlns:a="http://schemas.openxmlformats.org/drawingml/2006/main" xmlns:r="http://schemas.openxmlformats.org/officeDocument/2006/relationships" xmlns:p="http://schemas.openxmlformats.org/presentationml/2006/main">
+  <p:cSld>
+    <p:spTree>
+      <p:nvGrpSpPr>
+        <p:cNvPr id="1" name="">
+          <a:extLst>
+            <a:ext uri="{FF2B5EF4-FFF2-40B4-BE49-F238E27FC236}">
+              <a16:creationId xmlns:a16="http://schemas.microsoft.com/office/drawing/2014/main" id="{853969E2-F1FA-A241-11DA-D0F1E52E06C7}"/>
+            </a:ext>
+          </a:extLst>
+        </p:cNvPr>
+        <p:cNvGrpSpPr/>
+        <p:nvPr/>
+      </p:nvGrpSpPr>
+      <p:grpSpPr>
+        <a:xfrm>
+          <a:off x="0" y="0"/>
+          <a:ext cx="0" cy="0"/>
+          <a:chOff x="0" y="0"/>
+          <a:chExt cx="0" cy="0"/>
+        </a:xfrm>
+      </p:grpSpPr>
+      <p:pic>
+        <p:nvPicPr>
+          <p:cNvPr id="13" name="Рисунок 12">
+            <a:extLst>
+              <a:ext uri="{FF2B5EF4-FFF2-40B4-BE49-F238E27FC236}">
+                <a16:creationId xmlns:a16="http://schemas.microsoft.com/office/drawing/2014/main" id="{3F495EC1-A183-B814-2110-40E3F850FC2F}"/>
+              </a:ext>
+            </a:extLst>
+          </p:cNvPr>
+          <p:cNvPicPr>
+            <a:picLocks noChangeAspect="1"/>
+          </p:cNvPicPr>
+          <p:nvPr/>
+        </p:nvPicPr>
+        <p:blipFill>
+          <a:blip r:embed="rId3">
+            <a:extLst>
+              <a:ext uri="{28A0092B-C50C-407E-A947-70E740481C1C}">
+                <a14:useLocalDpi xmlns:a14="http://schemas.microsoft.com/office/drawing/2010/main" val="0"/>
+              </a:ext>
+            </a:extLst>
+          </a:blip>
+          <a:stretch>
+            <a:fillRect/>
+          </a:stretch>
+        </p:blipFill>
+        <p:spPr>
+          <a:xfrm>
+            <a:off x="0" y="0"/>
+            <a:ext cx="12191999" cy="6858000"/>
+          </a:xfrm>
+          <a:prstGeom prst="rect">
+            <a:avLst/>
+          </a:prstGeom>
+        </p:spPr>
+      </p:pic>
+      <p:pic>
+        <p:nvPicPr>
+          <p:cNvPr id="8" name="Рисунок 7">
+            <a:extLst>
+              <a:ext uri="{FF2B5EF4-FFF2-40B4-BE49-F238E27FC236}">
+                <a16:creationId xmlns:a16="http://schemas.microsoft.com/office/drawing/2014/main" id="{55E9AF39-8988-9CDD-8B3B-BA84FBF40E67}"/>
+              </a:ext>
+            </a:extLst>
+          </p:cNvPr>
+          <p:cNvPicPr>
+            <a:picLocks noChangeAspect="1"/>
+          </p:cNvPicPr>
+          <p:nvPr/>
+        </p:nvPicPr>
+        <p:blipFill>
+          <a:blip r:embed="rId4"/>
+          <a:stretch>
+            <a:fillRect/>
+          </a:stretch>
+        </p:blipFill>
+        <p:spPr>
+          <a:xfrm>
+            <a:off x="493415" y="1221480"/>
+            <a:ext cx="11205167" cy="4415040"/>
+          </a:xfrm>
+          <a:prstGeom prst="rect">
+            <a:avLst/>
+          </a:prstGeom>
+          <a:solidFill>
+            <a:srgbClr val="FFFFFF">
+              <a:shade val="85000"/>
+            </a:srgbClr>
+          </a:solidFill>
+          <a:ln w="88900" cap="sq">
+            <a:solidFill>
+              <a:srgbClr val="FFFFFF"/>
+            </a:solidFill>
+            <a:miter lim="800000"/>
+          </a:ln>
+          <a:effectLst>
+            <a:outerShdw blurRad="55000" dist="18000" dir="5400000" algn="tl" rotWithShape="0">
+              <a:srgbClr val="000000">
+                <a:alpha val="40000"/>
+              </a:srgbClr>
+            </a:outerShdw>
+          </a:effectLst>
+          <a:scene3d>
+            <a:camera prst="orthographicFront"/>
+            <a:lightRig rig="twoPt" dir="t">
+              <a:rot lat="0" lon="0" rev="7200000"/>
+            </a:lightRig>
+          </a:scene3d>
+          <a:sp3d>
+            <a:bevelT w="25400" h="19050"/>
+            <a:contourClr>
+              <a:srgbClr val="FFFFFF"/>
+            </a:contourClr>
+          </a:sp3d>
+        </p:spPr>
+      </p:pic>
+    </p:spTree>
+    <p:extLst>
+      <p:ext uri="{BB962C8B-B14F-4D97-AF65-F5344CB8AC3E}">
+        <p14:creationId xmlns:p14="http://schemas.microsoft.com/office/powerpoint/2010/main" val="3086935877"/>
+      </p:ext>
+    </p:extLst>
+  </p:cSld>
+  <p:clrMapOvr>
+    <a:masterClrMapping/>
+  </p:clrMapOvr>
+</p:sld>
+</file>
+
+<file path=ppt/slides/slide9.xml><?xml version="1.0" encoding="utf-8"?>
+<p:sld xmlns:a="http://schemas.openxmlformats.org/drawingml/2006/main" xmlns:r="http://schemas.openxmlformats.org/officeDocument/2006/relationships" xmlns:p="http://schemas.openxmlformats.org/presentationml/2006/main">
+  <p:cSld>
+    <p:spTree>
+      <p:nvGrpSpPr>
+        <p:cNvPr id="1" name="">
+          <a:extLst>
+            <a:ext uri="{FF2B5EF4-FFF2-40B4-BE49-F238E27FC236}">
+              <a16:creationId xmlns:a16="http://schemas.microsoft.com/office/drawing/2014/main" id="{ED5A0F0E-8028-0335-EA69-29950F20CCF8}"/>
+            </a:ext>
+          </a:extLst>
+        </p:cNvPr>
+        <p:cNvGrpSpPr/>
+        <p:nvPr/>
+      </p:nvGrpSpPr>
+      <p:grpSpPr>
+        <a:xfrm>
+          <a:off x="0" y="0"/>
+          <a:ext cx="0" cy="0"/>
+          <a:chOff x="0" y="0"/>
+          <a:chExt cx="0" cy="0"/>
+        </a:xfrm>
+      </p:grpSpPr>
+      <p:pic>
+        <p:nvPicPr>
+          <p:cNvPr id="13" name="Рисунок 12">
+            <a:extLst>
+              <a:ext uri="{FF2B5EF4-FFF2-40B4-BE49-F238E27FC236}">
+                <a16:creationId xmlns:a16="http://schemas.microsoft.com/office/drawing/2014/main" id="{8D799063-DEDA-195C-C361-AA3FEB612676}"/>
+              </a:ext>
+            </a:extLst>
+          </p:cNvPr>
+          <p:cNvPicPr>
+            <a:picLocks noChangeAspect="1"/>
+          </p:cNvPicPr>
+          <p:nvPr/>
+        </p:nvPicPr>
+        <p:blipFill>
+          <a:blip r:embed="rId3">
+            <a:extLst>
+              <a:ext uri="{28A0092B-C50C-407E-A947-70E740481C1C}">
+                <a14:useLocalDpi xmlns:a14="http://schemas.microsoft.com/office/drawing/2010/main" val="0"/>
+              </a:ext>
+            </a:extLst>
+          </a:blip>
+          <a:stretch>
+            <a:fillRect/>
+          </a:stretch>
+        </p:blipFill>
+        <p:spPr>
+          <a:xfrm>
+            <a:off x="0" y="0"/>
+            <a:ext cx="12191999" cy="6858000"/>
+          </a:xfrm>
+          <a:prstGeom prst="rect">
+            <a:avLst/>
+          </a:prstGeom>
+        </p:spPr>
+      </p:pic>
+      <p:pic>
+        <p:nvPicPr>
+          <p:cNvPr id="10" name="Рисунок 9">
+            <a:extLst>
+              <a:ext uri="{FF2B5EF4-FFF2-40B4-BE49-F238E27FC236}">
+                <a16:creationId xmlns:a16="http://schemas.microsoft.com/office/drawing/2014/main" id="{12BC909B-CBAD-780D-E1BC-7CDDB5D3305C}"/>
+              </a:ext>
+            </a:extLst>
+          </p:cNvPr>
+          <p:cNvPicPr>
+            <a:picLocks noChangeAspect="1"/>
+          </p:cNvPicPr>
+          <p:nvPr/>
+        </p:nvPicPr>
+        <p:blipFill>
+          <a:blip r:embed="rId4"/>
+          <a:stretch>
+            <a:fillRect/>
+          </a:stretch>
+        </p:blipFill>
+        <p:spPr>
+          <a:xfrm>
+            <a:off x="1206669" y="0"/>
+            <a:ext cx="9778659" cy="6858000"/>
+          </a:xfrm>
+          <a:prstGeom prst="rect">
+            <a:avLst/>
+          </a:prstGeom>
+          <a:solidFill>
+            <a:srgbClr val="FFFFFF">
+              <a:shade val="85000"/>
+            </a:srgbClr>
+          </a:solidFill>
+          <a:ln w="88900" cap="sq">
+            <a:solidFill>
+              <a:srgbClr val="FFFFFF"/>
+            </a:solidFill>
+            <a:miter lim="800000"/>
+          </a:ln>
+          <a:effectLst>
+            <a:outerShdw blurRad="55000" dist="18000" dir="5400000" algn="tl" rotWithShape="0">
+              <a:srgbClr val="000000">
+                <a:alpha val="40000"/>
+              </a:srgbClr>
+            </a:outerShdw>
+          </a:effectLst>
+          <a:scene3d>
+            <a:camera prst="orthographicFront"/>
+            <a:lightRig rig="twoPt" dir="t">
+              <a:rot lat="0" lon="0" rev="7200000"/>
+            </a:lightRig>
+          </a:scene3d>
+          <a:sp3d>
+            <a:bevelT w="25400" h="19050"/>
+            <a:contourClr>
+              <a:srgbClr val="FFFFFF"/>
+            </a:contourClr>
+          </a:sp3d>
+        </p:spPr>
+      </p:pic>
+    </p:spTree>
+    <p:extLst>
+      <p:ext uri="{BB962C8B-B14F-4D97-AF65-F5344CB8AC3E}">
+        <p14:creationId xmlns:p14="http://schemas.microsoft.com/office/powerpoint/2010/main" val="1129524981"/>
       </p:ext>
     </p:extLst>
   </p:cSld>
